--- a/folletos/2026-04/pptx/FIP_VANTRUST_LIQUIDEZ_RECURRENTE.pptx
+++ b/folletos/2026-04/pptx/FIP_VANTRUST_LIQUIDEZ_RECURRENTE.pptx
@@ -2846,7 +2846,7 @@
                 <a:ea typeface="Calibri" pitchFamily="34" charset="-122"/>
                 <a:cs typeface="Calibri" pitchFamily="34" charset="-120"/>
               </a:rPr>
-              <a:t>prueba CLP</a:t>
+              <a:t>prueba 2 CLP</a:t>
             </a:r>
             <a:endParaRPr lang="en-US" sz="800" dirty="0"/>
           </a:p>

--- a/folletos/2026-04/pptx/FIP_VANTRUST_LIQUIDEZ_RECURRENTE.pptx
+++ b/folletos/2026-04/pptx/FIP_VANTRUST_LIQUIDEZ_RECURRENTE.pptx
@@ -3251,7 +3251,7 @@
                 <a:ea typeface="Calibri" pitchFamily="34" charset="-122"/>
                 <a:cs typeface="Calibri" pitchFamily="34" charset="-120"/>
               </a:rPr>
-              <a:t>prueba CLP</a:t>
+              <a:t>prueba 3 CLP</a:t>
             </a:r>
             <a:endParaRPr lang="en-US" sz="800" dirty="0"/>
           </a:p>

--- a/folletos/2026-04/pptx/FIP_VANTRUST_LIQUIDEZ_RECURRENTE.pptx
+++ b/folletos/2026-04/pptx/FIP_VANTRUST_LIQUIDEZ_RECURRENTE.pptx
@@ -3491,7 +3491,7 @@
                 <a:ea typeface="Calibri" pitchFamily="34" charset="-122"/>
                 <a:cs typeface="Calibri" pitchFamily="34" charset="-120"/>
               </a:rPr>
-              <a:t>prueba CLP</a:t>
+              <a:t>prueba 4 CLP</a:t>
             </a:r>
             <a:endParaRPr lang="en-US" sz="800" dirty="0"/>
           </a:p>

--- a/folletos/2026-04/pptx/FIP_VANTRUST_LIQUIDEZ_RECURRENTE.pptx
+++ b/folletos/2026-04/pptx/FIP_VANTRUST_LIQUIDEZ_RECURRENTE.pptx
@@ -3541,7 +3541,7 @@
                 <a:ea typeface="Calibri" pitchFamily="34" charset="-122"/>
                 <a:cs typeface="Calibri" pitchFamily="34" charset="-120"/>
               </a:rPr>
-              <a:t>prueba CLP</a:t>
+              <a:t>prueba 6 CLP</a:t>
             </a:r>
             <a:endParaRPr lang="en-US" sz="800" dirty="0"/>
           </a:p>

--- a/folletos/2026-04/pptx/FIP_VANTRUST_LIQUIDEZ_RECURRENTE.pptx
+++ b/folletos/2026-04/pptx/FIP_VANTRUST_LIQUIDEZ_RECURRENTE.pptx
@@ -3541,7 +3541,7 @@
                 <a:ea typeface="Calibri" pitchFamily="34" charset="-122"/>
                 <a:cs typeface="Calibri" pitchFamily="34" charset="-120"/>
               </a:rPr>
-              <a:t>prueba 6 CLP</a:t>
+              <a:t>prueba CLP</a:t>
             </a:r>
             <a:endParaRPr lang="en-US" sz="800" dirty="0"/>
           </a:p>
@@ -30421,13 +30421,91 @@
       </p:sp>
       <p:sp>
         <p:nvSpPr>
-          <p:cNvPr id="8" name="Shape 6"/>
+          <p:cNvPr id="8" name="Text 6"/>
           <p:cNvSpPr/>
           <p:nvPr/>
         </p:nvSpPr>
         <p:spPr>
           <a:xfrm>
-            <a:off x="118872" y="1810512"/>
+            <a:off x="118872" y="1719072"/>
+            <a:ext cx="1188720" cy="173736"/>
+          </a:xfrm>
+          <a:prstGeom prst="rect">
+            <a:avLst/>
+          </a:prstGeom>
+          <a:noFill/>
+          <a:ln/>
+        </p:spPr>
+        <p:txBody>
+          <a:bodyPr wrap="square" lIns="0" tIns="0" rIns="0" bIns="0" rtlCol="0" anchor="ctr"/>
+          <a:lstStyle/>
+          <a:p>
+            <a:pPr indent="0" marL="0">
+              <a:buNone/>
+            </a:pPr>
+            <a:r>
+              <a:rPr lang="en-US" sz="750" dirty="0">
+                <a:solidFill>
+                  <a:srgbClr val="000000"/>
+                </a:solidFill>
+                <a:latin typeface="Calibri" pitchFamily="34" charset="0"/>
+                <a:ea typeface="Calibri" pitchFamily="34" charset="-122"/>
+                <a:cs typeface="Calibri" pitchFamily="34" charset="-120"/>
+              </a:rPr>
+              <a:t>CLP</a:t>
+            </a:r>
+            <a:endParaRPr lang="en-US" sz="750" dirty="0"/>
+          </a:p>
+        </p:txBody>
+      </p:sp>
+      <p:sp>
+        <p:nvSpPr>
+          <p:cNvPr id="9" name="Text 7"/>
+          <p:cNvSpPr/>
+          <p:nvPr/>
+        </p:nvSpPr>
+        <p:spPr>
+          <a:xfrm>
+            <a:off x="1307592" y="1719072"/>
+            <a:ext cx="1024128" cy="173736"/>
+          </a:xfrm>
+          <a:prstGeom prst="rect">
+            <a:avLst/>
+          </a:prstGeom>
+          <a:noFill/>
+          <a:ln/>
+        </p:spPr>
+        <p:txBody>
+          <a:bodyPr wrap="square" lIns="0" tIns="0" rIns="0" bIns="0" rtlCol="0" anchor="ctr"/>
+          <a:lstStyle/>
+          <a:p>
+            <a:pPr algn="r" indent="0" marL="0">
+              <a:buNone/>
+            </a:pPr>
+            <a:r>
+              <a:rPr lang="en-US" sz="750" b="1" dirty="0">
+                <a:solidFill>
+                  <a:srgbClr val="000000"/>
+                </a:solidFill>
+                <a:latin typeface="Calibri" pitchFamily="34" charset="0"/>
+                <a:ea typeface="Calibri" pitchFamily="34" charset="-122"/>
+                <a:cs typeface="Calibri" pitchFamily="34" charset="-120"/>
+              </a:rPr>
+              <a:t>100,00%</a:t>
+            </a:r>
+            <a:endParaRPr lang="en-US" sz="750" dirty="0"/>
+          </a:p>
+        </p:txBody>
+      </p:sp>
+      <p:sp>
+        <p:nvSpPr>
+          <p:cNvPr id="10" name="Shape 8"/>
+          <p:cNvSpPr/>
+          <p:nvPr/>
+        </p:nvSpPr>
+        <p:spPr>
+          <a:xfrm>
+            <a:off x="118872" y="2002536"/>
             <a:ext cx="2212848" cy="0"/>
           </a:xfrm>
           <a:prstGeom prst="line">
@@ -30444,13 +30522,13 @@
       </p:sp>
       <p:sp>
         <p:nvSpPr>
-          <p:cNvPr id="9" name="Text 7"/>
+          <p:cNvPr id="11" name="Text 9"/>
           <p:cNvSpPr/>
           <p:nvPr/>
         </p:nvSpPr>
         <p:spPr>
           <a:xfrm>
-            <a:off x="118872" y="1901952"/>
+            <a:off x="118872" y="2093976"/>
             <a:ext cx="2212848" cy="164592"/>
           </a:xfrm>
           <a:prstGeom prst="rect">
@@ -30483,13 +30561,13 @@
       </p:sp>
       <p:sp>
         <p:nvSpPr>
-          <p:cNvPr id="10" name="Shape 8"/>
+          <p:cNvPr id="12" name="Shape 10"/>
           <p:cNvSpPr/>
           <p:nvPr/>
         </p:nvSpPr>
         <p:spPr>
           <a:xfrm>
-            <a:off x="118872" y="2084832"/>
+            <a:off x="118872" y="2276856"/>
             <a:ext cx="2212848" cy="0"/>
           </a:xfrm>
           <a:prstGeom prst="line">
@@ -30506,13 +30584,13 @@
       </p:sp>
       <p:sp>
         <p:nvSpPr>
-          <p:cNvPr id="11" name="Text 9"/>
+          <p:cNvPr id="13" name="Text 11"/>
           <p:cNvSpPr/>
           <p:nvPr/>
         </p:nvSpPr>
         <p:spPr>
           <a:xfrm>
-            <a:off x="118872" y="2157984"/>
+            <a:off x="118872" y="2350008"/>
             <a:ext cx="1371600" cy="164592"/>
           </a:xfrm>
           <a:prstGeom prst="rect">
@@ -30545,13 +30623,13 @@
       </p:sp>
       <p:sp>
         <p:nvSpPr>
-          <p:cNvPr id="12" name="Text 10"/>
+          <p:cNvPr id="14" name="Text 12"/>
           <p:cNvSpPr/>
           <p:nvPr/>
         </p:nvSpPr>
         <p:spPr>
           <a:xfrm>
-            <a:off x="1490472" y="2157984"/>
+            <a:off x="1490472" y="2350008"/>
             <a:ext cx="841248" cy="164592"/>
           </a:xfrm>
           <a:prstGeom prst="rect">
@@ -30576,7 +30654,7 @@
                 <a:ea typeface="Calibri" pitchFamily="34" charset="-122"/>
                 <a:cs typeface="Calibri" pitchFamily="34" charset="-120"/>
               </a:rPr>
-              <a:t>100,00%</a:t>
+              <a:t>60,71%</a:t>
             </a:r>
             <a:endParaRPr lang="en-US" sz="700" dirty="0"/>
           </a:p>
@@ -30584,13 +30662,91 @@
       </p:sp>
       <p:sp>
         <p:nvSpPr>
-          <p:cNvPr id="13" name="Shape 11"/>
+          <p:cNvPr id="15" name="Text 13"/>
           <p:cNvSpPr/>
           <p:nvPr/>
         </p:nvSpPr>
         <p:spPr>
           <a:xfrm>
-            <a:off x="118872" y="2423160"/>
+            <a:off x="118872" y="2523744"/>
+            <a:ext cx="1371600" cy="164592"/>
+          </a:xfrm>
+          <a:prstGeom prst="rect">
+            <a:avLst/>
+          </a:prstGeom>
+          <a:noFill/>
+          <a:ln/>
+        </p:spPr>
+        <p:txBody>
+          <a:bodyPr wrap="square" lIns="0" tIns="0" rIns="0" bIns="0" rtlCol="0" anchor="ctr"/>
+          <a:lstStyle/>
+          <a:p>
+            <a:pPr indent="0" marL="0">
+              <a:buNone/>
+            </a:pPr>
+            <a:r>
+              <a:rPr lang="en-US" sz="700" dirty="0">
+                <a:solidFill>
+                  <a:srgbClr val="000000"/>
+                </a:solidFill>
+                <a:latin typeface="Calibri" pitchFamily="34" charset="0"/>
+                <a:ea typeface="Calibri" pitchFamily="34" charset="-122"/>
+                <a:cs typeface="Calibri" pitchFamily="34" charset="-120"/>
+              </a:rPr>
+              <a:t>Inmob</a:t>
+            </a:r>
+            <a:endParaRPr lang="en-US" sz="700" dirty="0"/>
+          </a:p>
+        </p:txBody>
+      </p:sp>
+      <p:sp>
+        <p:nvSpPr>
+          <p:cNvPr id="16" name="Text 14"/>
+          <p:cNvSpPr/>
+          <p:nvPr/>
+        </p:nvSpPr>
+        <p:spPr>
+          <a:xfrm>
+            <a:off x="1490472" y="2523744"/>
+            <a:ext cx="841248" cy="164592"/>
+          </a:xfrm>
+          <a:prstGeom prst="rect">
+            <a:avLst/>
+          </a:prstGeom>
+          <a:noFill/>
+          <a:ln/>
+        </p:spPr>
+        <p:txBody>
+          <a:bodyPr wrap="square" lIns="0" tIns="0" rIns="0" bIns="0" rtlCol="0" anchor="ctr"/>
+          <a:lstStyle/>
+          <a:p>
+            <a:pPr algn="r" indent="0" marL="0">
+              <a:buNone/>
+            </a:pPr>
+            <a:r>
+              <a:rPr lang="en-US" sz="700" b="1" dirty="0">
+                <a:solidFill>
+                  <a:srgbClr val="000000"/>
+                </a:solidFill>
+                <a:latin typeface="Calibri" pitchFamily="34" charset="0"/>
+                <a:ea typeface="Calibri" pitchFamily="34" charset="-122"/>
+                <a:cs typeface="Calibri" pitchFamily="34" charset="-120"/>
+              </a:rPr>
+              <a:t>39,29%</a:t>
+            </a:r>
+            <a:endParaRPr lang="en-US" sz="700" dirty="0"/>
+          </a:p>
+        </p:txBody>
+      </p:sp>
+      <p:sp>
+        <p:nvSpPr>
+          <p:cNvPr id="17" name="Shape 15"/>
+          <p:cNvSpPr/>
+          <p:nvPr/>
+        </p:nvSpPr>
+        <p:spPr>
+          <a:xfrm>
+            <a:off x="118872" y="2788920"/>
             <a:ext cx="2212848" cy="0"/>
           </a:xfrm>
           <a:prstGeom prst="line">
@@ -30607,13 +30763,13 @@
       </p:sp>
       <p:sp>
         <p:nvSpPr>
-          <p:cNvPr id="14" name="Text 12"/>
+          <p:cNvPr id="18" name="Text 16"/>
           <p:cNvSpPr/>
           <p:nvPr/>
         </p:nvSpPr>
         <p:spPr>
           <a:xfrm>
-            <a:off x="118872" y="2514600"/>
+            <a:off x="118872" y="2880360"/>
             <a:ext cx="2212848" cy="164592"/>
           </a:xfrm>
           <a:prstGeom prst="rect">
@@ -30646,13 +30802,13 @@
       </p:sp>
       <p:sp>
         <p:nvSpPr>
-          <p:cNvPr id="15" name="Shape 13"/>
+          <p:cNvPr id="19" name="Shape 17"/>
           <p:cNvSpPr/>
           <p:nvPr/>
         </p:nvSpPr>
         <p:spPr>
           <a:xfrm>
-            <a:off x="118872" y="2697480"/>
+            <a:off x="118872" y="3063240"/>
             <a:ext cx="2212848" cy="0"/>
           </a:xfrm>
           <a:prstGeom prst="line">
@@ -30669,13 +30825,13 @@
       </p:sp>
       <p:sp>
         <p:nvSpPr>
-          <p:cNvPr id="16" name="Text 14"/>
+          <p:cNvPr id="20" name="Text 18"/>
           <p:cNvSpPr/>
           <p:nvPr/>
         </p:nvSpPr>
         <p:spPr>
           <a:xfrm>
-            <a:off x="118872" y="2770632"/>
+            <a:off x="118872" y="3136392"/>
             <a:ext cx="1371600" cy="182880"/>
           </a:xfrm>
           <a:prstGeom prst="rect">
@@ -30708,13 +30864,13 @@
       </p:sp>
       <p:sp>
         <p:nvSpPr>
-          <p:cNvPr id="17" name="Text 15"/>
+          <p:cNvPr id="21" name="Text 19"/>
           <p:cNvSpPr/>
           <p:nvPr/>
         </p:nvSpPr>
         <p:spPr>
           <a:xfrm>
-            <a:off x="1490472" y="2770632"/>
+            <a:off x="1490472" y="3136392"/>
             <a:ext cx="841248" cy="182880"/>
           </a:xfrm>
           <a:prstGeom prst="rect">
@@ -30739,7 +30895,7 @@
                 <a:ea typeface="Calibri" pitchFamily="34" charset="-122"/>
                 <a:cs typeface="Calibri" pitchFamily="34" charset="-120"/>
               </a:rPr>
-              <a:t>63,16%</a:t>
+              <a:t>36,89%</a:t>
             </a:r>
             <a:endParaRPr lang="en-US" sz="750" dirty="0"/>
           </a:p>
@@ -30747,13 +30903,13 @@
       </p:sp>
       <p:sp>
         <p:nvSpPr>
-          <p:cNvPr id="18" name="Text 16"/>
+          <p:cNvPr id="22" name="Text 20"/>
           <p:cNvSpPr/>
           <p:nvPr/>
         </p:nvSpPr>
         <p:spPr>
           <a:xfrm>
-            <a:off x="118872" y="2971800"/>
+            <a:off x="118872" y="3337560"/>
             <a:ext cx="1371600" cy="182880"/>
           </a:xfrm>
           <a:prstGeom prst="rect">
@@ -30786,13 +30942,13 @@
       </p:sp>
       <p:sp>
         <p:nvSpPr>
-          <p:cNvPr id="19" name="Text 17"/>
+          <p:cNvPr id="23" name="Text 21"/>
           <p:cNvSpPr/>
           <p:nvPr/>
         </p:nvSpPr>
         <p:spPr>
           <a:xfrm>
-            <a:off x="1490472" y="2971800"/>
+            <a:off x="1490472" y="3337560"/>
             <a:ext cx="841248" cy="182880"/>
           </a:xfrm>
           <a:prstGeom prst="rect">
@@ -30817,7 +30973,7 @@
                 <a:ea typeface="Calibri" pitchFamily="34" charset="-122"/>
                 <a:cs typeface="Calibri" pitchFamily="34" charset="-120"/>
               </a:rPr>
-              <a:t>28,00%</a:t>
+              <a:t>61,21%</a:t>
             </a:r>
             <a:endParaRPr lang="en-US" sz="750" dirty="0"/>
           </a:p>
@@ -30825,13 +30981,13 @@
       </p:sp>
       <p:sp>
         <p:nvSpPr>
-          <p:cNvPr id="20" name="Text 18"/>
+          <p:cNvPr id="24" name="Text 22"/>
           <p:cNvSpPr/>
           <p:nvPr/>
         </p:nvSpPr>
         <p:spPr>
           <a:xfrm>
-            <a:off x="118872" y="3172968"/>
+            <a:off x="118872" y="3538728"/>
             <a:ext cx="1371600" cy="182880"/>
           </a:xfrm>
           <a:prstGeom prst="rect">
@@ -30864,13 +31020,13 @@
       </p:sp>
       <p:sp>
         <p:nvSpPr>
-          <p:cNvPr id="21" name="Text 19"/>
+          <p:cNvPr id="25" name="Text 23"/>
           <p:cNvSpPr/>
           <p:nvPr/>
         </p:nvSpPr>
         <p:spPr>
           <a:xfrm>
-            <a:off x="1490472" y="3172968"/>
+            <a:off x="1490472" y="3538728"/>
             <a:ext cx="841248" cy="182880"/>
           </a:xfrm>
           <a:prstGeom prst="rect">
@@ -30895,7 +31051,7 @@
                 <a:ea typeface="Calibri" pitchFamily="34" charset="-122"/>
                 <a:cs typeface="Calibri" pitchFamily="34" charset="-120"/>
               </a:rPr>
-              <a:t>8,84%</a:t>
+              <a:t>1,90%</a:t>
             </a:r>
             <a:endParaRPr lang="en-US" sz="750" dirty="0"/>
           </a:p>
@@ -30903,13 +31059,13 @@
       </p:sp>
       <p:sp>
         <p:nvSpPr>
-          <p:cNvPr id="22" name="Text 20"/>
+          <p:cNvPr id="26" name="Text 24"/>
           <p:cNvSpPr/>
           <p:nvPr/>
         </p:nvSpPr>
         <p:spPr>
           <a:xfrm>
-            <a:off x="118872" y="3374136"/>
+            <a:off x="118872" y="3739896"/>
             <a:ext cx="1371600" cy="182880"/>
           </a:xfrm>
           <a:prstGeom prst="rect">
@@ -30942,13 +31098,13 @@
       </p:sp>
       <p:sp>
         <p:nvSpPr>
-          <p:cNvPr id="23" name="Text 21"/>
+          <p:cNvPr id="27" name="Text 25"/>
           <p:cNvSpPr/>
           <p:nvPr/>
         </p:nvSpPr>
         <p:spPr>
           <a:xfrm>
-            <a:off x="1490472" y="3374136"/>
+            <a:off x="1490472" y="3739896"/>
             <a:ext cx="841248" cy="182880"/>
           </a:xfrm>
           <a:prstGeom prst="rect">
@@ -30981,7 +31137,7 @@
       </p:sp>
       <p:sp>
         <p:nvSpPr>
-          <p:cNvPr id="24" name="Text 22"/>
+          <p:cNvPr id="28" name="Text 26"/>
           <p:cNvSpPr/>
           <p:nvPr/>
         </p:nvSpPr>
@@ -31020,7 +31176,7 @@
       </p:sp>
       <p:sp>
         <p:nvSpPr>
-          <p:cNvPr id="25" name="Shape 23"/>
+          <p:cNvPr id="29" name="Shape 27"/>
           <p:cNvSpPr/>
           <p:nvPr/>
         </p:nvSpPr>
@@ -31043,7 +31199,7 @@
       </p:sp>
       <p:sp>
         <p:nvSpPr>
-          <p:cNvPr id="26" name="Text 24"/>
+          <p:cNvPr id="30" name="Text 28"/>
           <p:cNvSpPr/>
           <p:nvPr/>
         </p:nvSpPr>
@@ -31099,7 +31255,7 @@
       </p:sp>
       <p:sp>
         <p:nvSpPr>
-          <p:cNvPr id="27" name="Text 25"/>
+          <p:cNvPr id="31" name="Text 29"/>
           <p:cNvSpPr/>
           <p:nvPr/>
         </p:nvSpPr>
@@ -31155,7 +31311,7 @@
       </p:sp>
       <p:sp>
         <p:nvSpPr>
-          <p:cNvPr id="28" name="Text 26"/>
+          <p:cNvPr id="32" name="Text 30"/>
           <p:cNvSpPr/>
           <p:nvPr/>
         </p:nvSpPr>
@@ -31211,7 +31367,7 @@
       </p:sp>
       <p:sp>
         <p:nvSpPr>
-          <p:cNvPr id="29" name="Text 27"/>
+          <p:cNvPr id="33" name="Text 31"/>
           <p:cNvSpPr/>
           <p:nvPr/>
         </p:nvSpPr>
@@ -31267,7 +31423,7 @@
       </p:sp>
       <p:sp>
         <p:nvSpPr>
-          <p:cNvPr id="30" name="Text 28"/>
+          <p:cNvPr id="34" name="Text 32"/>
           <p:cNvSpPr/>
           <p:nvPr/>
         </p:nvSpPr>
@@ -31323,7 +31479,7 @@
       </p:sp>
       <p:sp>
         <p:nvSpPr>
-          <p:cNvPr id="31" name="Text 29"/>
+          <p:cNvPr id="35" name="Text 33"/>
           <p:cNvSpPr/>
           <p:nvPr/>
         </p:nvSpPr>
@@ -31379,7 +31535,7 @@
       </p:sp>
       <p:sp>
         <p:nvSpPr>
-          <p:cNvPr id="32" name="Text 30"/>
+          <p:cNvPr id="36" name="Text 34"/>
           <p:cNvSpPr/>
           <p:nvPr/>
         </p:nvSpPr>
@@ -31435,7 +31591,7 @@
       </p:sp>
       <p:sp>
         <p:nvSpPr>
-          <p:cNvPr id="33" name="Text 31"/>
+          <p:cNvPr id="37" name="Text 35"/>
           <p:cNvSpPr/>
           <p:nvPr/>
         </p:nvSpPr>
@@ -31491,7 +31647,7 @@
       </p:sp>
       <p:sp>
         <p:nvSpPr>
-          <p:cNvPr id="34" name="Text 32"/>
+          <p:cNvPr id="38" name="Text 36"/>
           <p:cNvSpPr/>
           <p:nvPr/>
         </p:nvSpPr>
@@ -31547,7 +31703,7 @@
       </p:sp>
       <p:sp>
         <p:nvSpPr>
-          <p:cNvPr id="35" name="Shape 33"/>
+          <p:cNvPr id="39" name="Shape 37"/>
           <p:cNvSpPr/>
           <p:nvPr/>
         </p:nvSpPr>
@@ -31570,7 +31726,7 @@
       </p:sp>
       <p:sp>
         <p:nvSpPr>
-          <p:cNvPr id="36" name="Text 34"/>
+          <p:cNvPr id="40" name="Text 38"/>
           <p:cNvSpPr/>
           <p:nvPr/>
         </p:nvSpPr>
@@ -31609,7 +31765,7 @@
       </p:sp>
       <p:sp>
         <p:nvSpPr>
-          <p:cNvPr id="37" name="Shape 35"/>
+          <p:cNvPr id="41" name="Shape 39"/>
           <p:cNvSpPr/>
           <p:nvPr/>
         </p:nvSpPr>
@@ -31632,7 +31788,7 @@
       </p:sp>
       <p:sp>
         <p:nvSpPr>
-          <p:cNvPr id="38" name="Text 36"/>
+          <p:cNvPr id="42" name="Text 40"/>
           <p:cNvSpPr/>
           <p:nvPr/>
         </p:nvSpPr>

--- a/folletos/2026-04/pptx/FIP_VANTRUST_LIQUIDEZ_RECURRENTE.pptx
+++ b/folletos/2026-04/pptx/FIP_VANTRUST_LIQUIDEZ_RECURRENTE.pptx
@@ -3541,7 +3541,7 @@
                 <a:ea typeface="Calibri" pitchFamily="34" charset="-122"/>
                 <a:cs typeface="Calibri" pitchFamily="34" charset="-120"/>
               </a:rPr>
-              <a:t>prueba CLP</a:t>
+              <a:t>prueba 8 CLP</a:t>
             </a:r>
             <a:endParaRPr lang="en-US" sz="800" dirty="0"/>
           </a:p>

--- a/folletos/2026-04/pptx/FIP_VANTRUST_LIQUIDEZ_RECURRENTE.pptx
+++ b/folletos/2026-04/pptx/FIP_VANTRUST_LIQUIDEZ_RECURRENTE.pptx
@@ -2970,7 +2970,7 @@
                 <a:ea typeface="Calibri" pitchFamily="34" charset="-122"/>
                 <a:cs typeface="Calibri" pitchFamily="34" charset="-120"/>
               </a:rPr>
-              <a:t>prueba CLP</a:t>
+              <a:t>prueba 10 CLP</a:t>
             </a:r>
             <a:endParaRPr lang="en-US" sz="800" dirty="0"/>
           </a:p>

--- a/folletos/2026-04/pptx/FIP_VANTRUST_LIQUIDEZ_RECURRENTE.pptx
+++ b/folletos/2026-04/pptx/FIP_VANTRUST_LIQUIDEZ_RECURRENTE.pptx
@@ -2970,7 +2970,7 @@
                 <a:ea typeface="Calibri" pitchFamily="34" charset="-122"/>
                 <a:cs typeface="Calibri" pitchFamily="34" charset="-120"/>
               </a:rPr>
-              <a:t>prueba 10 CLP</a:t>
+              <a:t>prueba 11 CLP</a:t>
             </a:r>
             <a:endParaRPr lang="en-US" sz="800" dirty="0"/>
           </a:p>

--- a/folletos/2026-04/pptx/FIP_VANTRUST_LIQUIDEZ_RECURRENTE.pptx
+++ b/folletos/2026-04/pptx/FIP_VANTRUST_LIQUIDEZ_RECURRENTE.pptx
@@ -2987,7 +2987,7 @@
                 <a:ea typeface="Calibri" pitchFamily="34" charset="-122"/>
                 <a:cs typeface="Calibri" pitchFamily="34" charset="-120"/>
               </a:rPr>
-              <a:t>prueba CLP</a:t>
+              <a:t>prueba 11 CLP</a:t>
             </a:r>
             <a:endParaRPr lang="en-US" sz="800" dirty="0"/>
           </a:p>

--- a/folletos/2026-04/pptx/FIP_VANTRUST_LIQUIDEZ_RECURRENTE.pptx
+++ b/folletos/2026-04/pptx/FIP_VANTRUST_LIQUIDEZ_RECURRENTE.pptx
@@ -2987,7 +2987,7 @@
                 <a:ea typeface="Calibri" pitchFamily="34" charset="-122"/>
                 <a:cs typeface="Calibri" pitchFamily="34" charset="-120"/>
               </a:rPr>
-              <a:t>prueba 11 CLP</a:t>
+              <a:t>prueba 12 CLP</a:t>
             </a:r>
             <a:endParaRPr lang="en-US" sz="800" dirty="0"/>
           </a:p>

--- a/folletos/2026-04/pptx/FIP_VANTRUST_LIQUIDEZ_RECURRENTE.pptx
+++ b/folletos/2026-04/pptx/FIP_VANTRUST_LIQUIDEZ_RECURRENTE.pptx
@@ -2969,7 +2969,7 @@
                 <a:ea typeface="Calibri" pitchFamily="34" charset="-122"/>
                 <a:cs typeface="Calibri" pitchFamily="34" charset="-120"/>
               </a:rPr>
-              <a:t>prueba CLP</a:t>
+              <a:t>prueba 12 CLP</a:t>
             </a:r>
             <a:endParaRPr lang="en-US" sz="800" dirty="0"/>
           </a:p>

--- a/folletos/2026-04/pptx/FIP_VANTRUST_LIQUIDEZ_RECURRENTE.pptx
+++ b/folletos/2026-04/pptx/FIP_VANTRUST_LIQUIDEZ_RECURRENTE.pptx
@@ -2969,7 +2969,7 @@
                 <a:ea typeface="Calibri" pitchFamily="34" charset="-122"/>
                 <a:cs typeface="Calibri" pitchFamily="34" charset="-120"/>
               </a:rPr>
-              <a:t>prueba 12 CLP</a:t>
+              <a:t>prueba CLP</a:t>
             </a:r>
             <a:endParaRPr lang="en-US" sz="800" dirty="0"/>
           </a:p>
@@ -6979,7 +6979,7 @@
                           <a:ea typeface="Calibri" pitchFamily="34" charset="-122"/>
                           <a:cs typeface="Calibri" pitchFamily="34" charset="-120"/>
                         </a:rPr>
-                        <a:t>0.00%</a:t>
+                        <a:t>0.21%</a:t>
                       </a:r>
                       <a:endParaRPr lang="en-US" sz="500" dirty="0">
                         <a:latin typeface="Calibri" charset="0"/>
@@ -7044,7 +7044,7 @@
                           <a:ea typeface="Calibri" pitchFamily="34" charset="-122"/>
                           <a:cs typeface="Calibri" pitchFamily="34" charset="-120"/>
                         </a:rPr>
-                        <a:t>0.00%</a:t>
+                        <a:t>0.17%</a:t>
                       </a:r>
                       <a:endParaRPr lang="en-US" sz="500" dirty="0">
                         <a:latin typeface="Calibri" charset="0"/>
@@ -7109,7 +7109,7 @@
                           <a:ea typeface="Calibri" pitchFamily="34" charset="-122"/>
                           <a:cs typeface="Calibri" pitchFamily="34" charset="-120"/>
                         </a:rPr>
-                        <a:t>0.00%</a:t>
+                        <a:t>0.17%</a:t>
                       </a:r>
                       <a:endParaRPr lang="en-US" sz="500" dirty="0">
                         <a:latin typeface="Calibri" charset="0"/>
@@ -7174,7 +7174,7 @@
                           <a:ea typeface="Calibri" pitchFamily="34" charset="-122"/>
                           <a:cs typeface="Calibri" pitchFamily="34" charset="-120"/>
                         </a:rPr>
-                        <a:t>0.00%</a:t>
+                        <a:t>0.15%</a:t>
                       </a:r>
                       <a:endParaRPr lang="en-US" sz="500" dirty="0">
                         <a:latin typeface="Calibri" charset="0"/>
@@ -7239,7 +7239,7 @@
                           <a:ea typeface="Calibri" pitchFamily="34" charset="-122"/>
                           <a:cs typeface="Calibri" pitchFamily="34" charset="-120"/>
                         </a:rPr>
-                        <a:t>0.00%</a:t>
+                        <a:t>0.15%</a:t>
                       </a:r>
                       <a:endParaRPr lang="en-US" sz="500" dirty="0">
                         <a:latin typeface="Calibri" charset="0"/>
@@ -7304,7 +7304,7 @@
                           <a:ea typeface="Calibri" pitchFamily="34" charset="-122"/>
                           <a:cs typeface="Calibri" pitchFamily="34" charset="-120"/>
                         </a:rPr>
-                        <a:t>0.00%</a:t>
+                        <a:t>0.13%</a:t>
                       </a:r>
                       <a:endParaRPr lang="en-US" sz="500" dirty="0">
                         <a:latin typeface="Calibri" charset="0"/>
@@ -7369,7 +7369,7 @@
                           <a:ea typeface="Calibri" pitchFamily="34" charset="-122"/>
                           <a:cs typeface="Calibri" pitchFamily="34" charset="-120"/>
                         </a:rPr>
-                        <a:t>0.00%</a:t>
+                        <a:t>0.11%</a:t>
                       </a:r>
                       <a:endParaRPr lang="en-US" sz="500" dirty="0">
                         <a:latin typeface="Calibri" charset="0"/>
@@ -7434,7 +7434,7 @@
                           <a:ea typeface="Calibri" pitchFamily="34" charset="-122"/>
                           <a:cs typeface="Calibri" pitchFamily="34" charset="-120"/>
                         </a:rPr>
-                        <a:t>0.00%</a:t>
+                        <a:t>0.11%</a:t>
                       </a:r>
                       <a:endParaRPr lang="en-US" sz="500" dirty="0">
                         <a:latin typeface="Calibri" charset="0"/>
@@ -7499,7 +7499,7 @@
                           <a:ea typeface="Calibri" pitchFamily="34" charset="-122"/>
                           <a:cs typeface="Calibri" pitchFamily="34" charset="-120"/>
                         </a:rPr>
-                        <a:t>0.00%</a:t>
+                        <a:t>0.11%</a:t>
                       </a:r>
                       <a:endParaRPr lang="en-US" sz="500" dirty="0">
                         <a:latin typeface="Calibri" charset="0"/>
@@ -7564,7 +7564,7 @@
                           <a:ea typeface="Calibri" pitchFamily="34" charset="-122"/>
                           <a:cs typeface="Calibri" pitchFamily="34" charset="-120"/>
                         </a:rPr>
-                        <a:t>0.00%</a:t>
+                        <a:t>0.11%</a:t>
                       </a:r>
                       <a:endParaRPr lang="en-US" sz="500" dirty="0">
                         <a:latin typeface="Calibri" charset="0"/>
@@ -7629,7 +7629,7 @@
                           <a:ea typeface="Calibri" pitchFamily="34" charset="-122"/>
                           <a:cs typeface="Calibri" pitchFamily="34" charset="-120"/>
                         </a:rPr>
-                        <a:t>0.00%</a:t>
+                        <a:t>0.11%</a:t>
                       </a:r>
                       <a:endParaRPr lang="en-US" sz="500" dirty="0">
                         <a:latin typeface="Calibri" charset="0"/>
@@ -7694,7 +7694,7 @@
                           <a:ea typeface="Calibri" pitchFamily="34" charset="-122"/>
                           <a:cs typeface="Calibri" pitchFamily="34" charset="-120"/>
                         </a:rPr>
-                        <a:t>0.00%</a:t>
+                        <a:t>0.11%</a:t>
                       </a:r>
                       <a:endParaRPr lang="en-US" sz="500" dirty="0">
                         <a:latin typeface="Calibri" charset="0"/>
@@ -7759,7 +7759,7 @@
                           <a:ea typeface="Calibri" pitchFamily="34" charset="-122"/>
                           <a:cs typeface="Calibri" pitchFamily="34" charset="-120"/>
                         </a:rPr>
-                        <a:t>0.02%</a:t>
+                        <a:t>1.64%</a:t>
                       </a:r>
                       <a:endParaRPr lang="en-US" sz="500" dirty="0">
                         <a:latin typeface="Calibri" charset="0"/>
@@ -7945,7 +7945,7 @@
                           <a:ea typeface="Calibri" pitchFamily="34" charset="-122"/>
                           <a:cs typeface="Calibri" pitchFamily="34" charset="-120"/>
                         </a:rPr>
-                        <a:t>0.00%</a:t>
+                        <a:t>0.29%</a:t>
                       </a:r>
                       <a:endParaRPr lang="en-US" sz="500" dirty="0">
                         <a:latin typeface="Calibri" charset="0"/>
@@ -8010,7 +8010,7 @@
                           <a:ea typeface="Calibri" pitchFamily="34" charset="-122"/>
                           <a:cs typeface="Calibri" pitchFamily="34" charset="-120"/>
                         </a:rPr>
-                        <a:t>0.00%</a:t>
+                        <a:t>0.19%</a:t>
                       </a:r>
                       <a:endParaRPr lang="en-US" sz="500" dirty="0">
                         <a:latin typeface="Calibri" charset="0"/>
@@ -8075,7 +8075,7 @@
                           <a:ea typeface="Calibri" pitchFamily="34" charset="-122"/>
                           <a:cs typeface="Calibri" pitchFamily="34" charset="-120"/>
                         </a:rPr>
-                        <a:t>0.00%</a:t>
+                        <a:t>0.23%</a:t>
                       </a:r>
                       <a:endParaRPr lang="en-US" sz="500" dirty="0">
                         <a:latin typeface="Calibri" charset="0"/>
@@ -8140,7 +8140,7 @@
                           <a:ea typeface="Calibri" pitchFamily="34" charset="-122"/>
                           <a:cs typeface="Calibri" pitchFamily="34" charset="-120"/>
                         </a:rPr>
-                        <a:t>0.00%</a:t>
+                        <a:t>0.19%</a:t>
                       </a:r>
                       <a:endParaRPr lang="en-US" sz="500" dirty="0">
                         <a:latin typeface="Calibri" charset="0"/>
@@ -8205,7 +8205,7 @@
                           <a:ea typeface="Calibri" pitchFamily="34" charset="-122"/>
                           <a:cs typeface="Calibri" pitchFamily="34" charset="-120"/>
                         </a:rPr>
-                        <a:t>0.00%</a:t>
+                        <a:t>0.14%</a:t>
                       </a:r>
                       <a:endParaRPr lang="en-US" sz="500" dirty="0">
                         <a:latin typeface="Calibri" charset="0"/>
@@ -8270,7 +8270,7 @@
                           <a:ea typeface="Calibri" pitchFamily="34" charset="-122"/>
                           <a:cs typeface="Calibri" pitchFamily="34" charset="-120"/>
                         </a:rPr>
-                        <a:t>0.01%</a:t>
+                        <a:t>0.66%</a:t>
                       </a:r>
                       <a:endParaRPr lang="en-US" sz="500" dirty="0">
                         <a:latin typeface="Calibri" charset="0"/>
@@ -8335,7 +8335,7 @@
                           <a:ea typeface="Calibri" pitchFamily="34" charset="-122"/>
                           <a:cs typeface="Calibri" pitchFamily="34" charset="-120"/>
                         </a:rPr>
-                        <a:t>0.00%</a:t>
+                        <a:t>0.31%</a:t>
                       </a:r>
                       <a:endParaRPr lang="en-US" sz="500" dirty="0">
                         <a:latin typeface="Calibri" charset="0"/>
@@ -8400,7 +8400,7 @@
                           <a:ea typeface="Calibri" pitchFamily="34" charset="-122"/>
                           <a:cs typeface="Calibri" pitchFamily="34" charset="-120"/>
                         </a:rPr>
-                        <a:t>0.00%</a:t>
+                        <a:t>0.29%</a:t>
                       </a:r>
                       <a:endParaRPr lang="en-US" sz="500" dirty="0">
                         <a:latin typeface="Calibri" charset="0"/>
@@ -8465,7 +8465,7 @@
                           <a:ea typeface="Calibri" pitchFamily="34" charset="-122"/>
                           <a:cs typeface="Calibri" pitchFamily="34" charset="-120"/>
                         </a:rPr>
-                        <a:t>0.00%</a:t>
+                        <a:t>0.24%</a:t>
                       </a:r>
                       <a:endParaRPr lang="en-US" sz="500" dirty="0">
                         <a:latin typeface="Calibri" charset="0"/>
@@ -8530,7 +8530,7 @@
                           <a:ea typeface="Calibri" pitchFamily="34" charset="-122"/>
                           <a:cs typeface="Calibri" pitchFamily="34" charset="-120"/>
                         </a:rPr>
-                        <a:t>0.00%</a:t>
+                        <a:t>0.20%</a:t>
                       </a:r>
                       <a:endParaRPr lang="en-US" sz="500" dirty="0">
                         <a:latin typeface="Calibri" charset="0"/>
@@ -8595,7 +8595,7 @@
                           <a:ea typeface="Calibri" pitchFamily="34" charset="-122"/>
                           <a:cs typeface="Calibri" pitchFamily="34" charset="-120"/>
                         </a:rPr>
-                        <a:t>0.00%</a:t>
+                        <a:t>0.24%</a:t>
                       </a:r>
                       <a:endParaRPr lang="en-US" sz="500" dirty="0">
                         <a:latin typeface="Calibri" charset="0"/>
@@ -8660,7 +8660,7 @@
                           <a:ea typeface="Calibri" pitchFamily="34" charset="-122"/>
                           <a:cs typeface="Calibri" pitchFamily="34" charset="-120"/>
                         </a:rPr>
-                        <a:t>0.00%</a:t>
+                        <a:t>0.24%</a:t>
                       </a:r>
                       <a:endParaRPr lang="en-US" sz="500" dirty="0">
                         <a:latin typeface="Calibri" charset="0"/>
@@ -8725,7 +8725,7 @@
                           <a:ea typeface="Calibri" pitchFamily="34" charset="-122"/>
                           <a:cs typeface="Calibri" pitchFamily="34" charset="-120"/>
                         </a:rPr>
-                        <a:t>0.03%</a:t>
+                        <a:t>3.27%</a:t>
                       </a:r>
                       <a:endParaRPr lang="en-US" sz="500" dirty="0">
                         <a:latin typeface="Calibri" charset="0"/>
@@ -9888,7 +9888,7 @@
                           <a:ea typeface="Calibri" pitchFamily="34" charset="-122"/>
                           <a:cs typeface="Calibri" pitchFamily="34" charset="-120"/>
                         </a:rPr>
-                        <a:t>0.00%</a:t>
+                        <a:t>0.12%</a:t>
                       </a:r>
                       <a:endParaRPr lang="en-US" sz="500" dirty="0">
                         <a:latin typeface="Calibri" charset="0"/>
@@ -9953,7 +9953,7 @@
                           <a:ea typeface="Calibri" pitchFamily="34" charset="-122"/>
                           <a:cs typeface="Calibri" pitchFamily="34" charset="-120"/>
                         </a:rPr>
-                        <a:t>0.00%</a:t>
+                        <a:t>0.11%</a:t>
                       </a:r>
                       <a:endParaRPr lang="en-US" sz="500" dirty="0">
                         <a:latin typeface="Calibri" charset="0"/>
@@ -10018,7 +10018,7 @@
                           <a:ea typeface="Calibri" pitchFamily="34" charset="-122"/>
                           <a:cs typeface="Calibri" pitchFamily="34" charset="-120"/>
                         </a:rPr>
-                        <a:t>0.00%</a:t>
+                        <a:t>0.11%</a:t>
                       </a:r>
                       <a:endParaRPr lang="en-US" sz="500" dirty="0">
                         <a:latin typeface="Calibri" charset="0"/>
@@ -10083,7 +10083,7 @@
                           <a:ea typeface="Calibri" pitchFamily="34" charset="-122"/>
                           <a:cs typeface="Calibri" pitchFamily="34" charset="-120"/>
                         </a:rPr>
-                        <a:t>0.00%</a:t>
+                        <a:t>0.10%</a:t>
                       </a:r>
                       <a:endParaRPr lang="en-US" sz="500" dirty="0">
                         <a:latin typeface="Calibri" charset="0"/>
@@ -10148,7 +10148,7 @@
                           <a:ea typeface="Calibri" pitchFamily="34" charset="-122"/>
                           <a:cs typeface="Calibri" pitchFamily="34" charset="-120"/>
                         </a:rPr>
-                        <a:t>0.00%</a:t>
+                        <a:t>0.10%</a:t>
                       </a:r>
                       <a:endParaRPr lang="en-US" sz="500" dirty="0">
                         <a:latin typeface="Calibri" charset="0"/>
@@ -10213,7 +10213,7 @@
                           <a:ea typeface="Calibri" pitchFamily="34" charset="-122"/>
                           <a:cs typeface="Calibri" pitchFamily="34" charset="-120"/>
                         </a:rPr>
-                        <a:t>0.00%</a:t>
+                        <a:t>0.10%</a:t>
                       </a:r>
                       <a:endParaRPr lang="en-US" sz="500" dirty="0">
                         <a:latin typeface="Calibri" charset="0"/>
@@ -10278,7 +10278,7 @@
                           <a:ea typeface="Calibri" pitchFamily="34" charset="-122"/>
                           <a:cs typeface="Calibri" pitchFamily="34" charset="-120"/>
                         </a:rPr>
-                        <a:t>0.00%</a:t>
+                        <a:t>0.10%</a:t>
                       </a:r>
                       <a:endParaRPr lang="en-US" sz="500" dirty="0">
                         <a:latin typeface="Calibri" charset="0"/>
@@ -10343,7 +10343,7 @@
                           <a:ea typeface="Calibri" pitchFamily="34" charset="-122"/>
                           <a:cs typeface="Calibri" pitchFamily="34" charset="-120"/>
                         </a:rPr>
-                        <a:t>0.00%</a:t>
+                        <a:t>0.10%</a:t>
                       </a:r>
                       <a:endParaRPr lang="en-US" sz="500" dirty="0">
                         <a:latin typeface="Calibri" charset="0"/>
@@ -10408,7 +10408,7 @@
                           <a:ea typeface="Calibri" pitchFamily="34" charset="-122"/>
                           <a:cs typeface="Calibri" pitchFamily="34" charset="-120"/>
                         </a:rPr>
-                        <a:t>0.00%</a:t>
+                        <a:t>0.10%</a:t>
                       </a:r>
                       <a:endParaRPr lang="en-US" sz="500" dirty="0">
                         <a:latin typeface="Calibri" charset="0"/>
@@ -10473,7 +10473,7 @@
                           <a:ea typeface="Calibri" pitchFamily="34" charset="-122"/>
                           <a:cs typeface="Calibri" pitchFamily="34" charset="-120"/>
                         </a:rPr>
-                        <a:t>0.00%</a:t>
+                        <a:t>0.11%</a:t>
                       </a:r>
                       <a:endParaRPr lang="en-US" sz="500" dirty="0">
                         <a:latin typeface="Calibri" charset="0"/>
@@ -10538,7 +10538,7 @@
                           <a:ea typeface="Calibri" pitchFamily="34" charset="-122"/>
                           <a:cs typeface="Calibri" pitchFamily="34" charset="-120"/>
                         </a:rPr>
-                        <a:t>0.00%</a:t>
+                        <a:t>0.10%</a:t>
                       </a:r>
                       <a:endParaRPr lang="en-US" sz="500" dirty="0">
                         <a:latin typeface="Calibri" charset="0"/>
@@ -10668,7 +10668,7 @@
                           <a:ea typeface="Calibri" pitchFamily="34" charset="-122"/>
                           <a:cs typeface="Calibri" pitchFamily="34" charset="-120"/>
                         </a:rPr>
-                        <a:t>3.11%</a:t>
+                        <a:t>4.30%</a:t>
                       </a:r>
                       <a:endParaRPr lang="en-US" sz="500" dirty="0">
                         <a:latin typeface="Calibri" charset="0"/>
@@ -10854,7 +10854,7 @@
                           <a:ea typeface="Calibri" pitchFamily="34" charset="-122"/>
                           <a:cs typeface="Calibri" pitchFamily="34" charset="-120"/>
                         </a:rPr>
-                        <a:t>0.00%</a:t>
+                        <a:t>0.25%</a:t>
                       </a:r>
                       <a:endParaRPr lang="en-US" sz="500" dirty="0">
                         <a:latin typeface="Calibri" charset="0"/>
@@ -10919,7 +10919,7 @@
                           <a:ea typeface="Calibri" pitchFamily="34" charset="-122"/>
                           <a:cs typeface="Calibri" pitchFamily="34" charset="-120"/>
                         </a:rPr>
-                        <a:t>0.00%</a:t>
+                        <a:t>0.30%</a:t>
                       </a:r>
                       <a:endParaRPr lang="en-US" sz="500" dirty="0">
                         <a:latin typeface="Calibri" charset="0"/>
@@ -10984,7 +10984,7 @@
                           <a:ea typeface="Calibri" pitchFamily="34" charset="-122"/>
                           <a:cs typeface="Calibri" pitchFamily="34" charset="-120"/>
                         </a:rPr>
-                        <a:t>0.00%</a:t>
+                        <a:t>0.24%</a:t>
                       </a:r>
                       <a:endParaRPr lang="en-US" sz="500" dirty="0">
                         <a:latin typeface="Calibri" charset="0"/>
@@ -11049,7 +11049,7 @@
                           <a:ea typeface="Calibri" pitchFamily="34" charset="-122"/>
                           <a:cs typeface="Calibri" pitchFamily="34" charset="-120"/>
                         </a:rPr>
-                        <a:t>0.00%</a:t>
+                        <a:t>0.22%</a:t>
                       </a:r>
                       <a:endParaRPr lang="en-US" sz="500" dirty="0">
                         <a:latin typeface="Calibri" charset="0"/>
@@ -11114,7 +11114,7 @@
                           <a:ea typeface="Calibri" pitchFamily="34" charset="-122"/>
                           <a:cs typeface="Calibri" pitchFamily="34" charset="-120"/>
                         </a:rPr>
-                        <a:t>0.00%</a:t>
+                        <a:t>0.23%</a:t>
                       </a:r>
                       <a:endParaRPr lang="en-US" sz="500" dirty="0">
                         <a:latin typeface="Calibri" charset="0"/>
@@ -11179,7 +11179,7 @@
                           <a:ea typeface="Calibri" pitchFamily="34" charset="-122"/>
                           <a:cs typeface="Calibri" pitchFamily="34" charset="-120"/>
                         </a:rPr>
-                        <a:t>0.00%</a:t>
+                        <a:t>0.24%</a:t>
                       </a:r>
                       <a:endParaRPr lang="en-US" sz="500" dirty="0">
                         <a:latin typeface="Calibri" charset="0"/>
@@ -11244,7 +11244,7 @@
                           <a:ea typeface="Calibri" pitchFamily="34" charset="-122"/>
                           <a:cs typeface="Calibri" pitchFamily="34" charset="-120"/>
                         </a:rPr>
-                        <a:t>0.00%</a:t>
+                        <a:t>0.25%</a:t>
                       </a:r>
                       <a:endParaRPr lang="en-US" sz="500" dirty="0">
                         <a:latin typeface="Calibri" charset="0"/>
@@ -11309,7 +11309,7 @@
                           <a:ea typeface="Calibri" pitchFamily="34" charset="-122"/>
                           <a:cs typeface="Calibri" pitchFamily="34" charset="-120"/>
                         </a:rPr>
-                        <a:t>0.00%</a:t>
+                        <a:t>0.23%</a:t>
                       </a:r>
                       <a:endParaRPr lang="en-US" sz="500" dirty="0">
                         <a:latin typeface="Calibri" charset="0"/>
@@ -11374,7 +11374,7 @@
                           <a:ea typeface="Calibri" pitchFamily="34" charset="-122"/>
                           <a:cs typeface="Calibri" pitchFamily="34" charset="-120"/>
                         </a:rPr>
-                        <a:t>0.00%</a:t>
+                        <a:t>0.24%</a:t>
                       </a:r>
                       <a:endParaRPr lang="en-US" sz="500" dirty="0">
                         <a:latin typeface="Calibri" charset="0"/>
@@ -11439,7 +11439,7 @@
                           <a:ea typeface="Calibri" pitchFamily="34" charset="-122"/>
                           <a:cs typeface="Calibri" pitchFamily="34" charset="-120"/>
                         </a:rPr>
-                        <a:t>0.00%</a:t>
+                        <a:t>0.26%</a:t>
                       </a:r>
                       <a:endParaRPr lang="en-US" sz="500" dirty="0">
                         <a:latin typeface="Calibri" charset="0"/>
@@ -11504,7 +11504,7 @@
                           <a:ea typeface="Calibri" pitchFamily="34" charset="-122"/>
                           <a:cs typeface="Calibri" pitchFamily="34" charset="-120"/>
                         </a:rPr>
-                        <a:t>0.00%</a:t>
+                        <a:t>0.26%</a:t>
                       </a:r>
                       <a:endParaRPr lang="en-US" sz="500" dirty="0">
                         <a:latin typeface="Calibri" charset="0"/>
@@ -11569,7 +11569,7 @@
                           <a:ea typeface="Calibri" pitchFamily="34" charset="-122"/>
                           <a:cs typeface="Calibri" pitchFamily="34" charset="-120"/>
                         </a:rPr>
-                        <a:t>0.00%</a:t>
+                        <a:t>0.20%</a:t>
                       </a:r>
                       <a:endParaRPr lang="en-US" sz="500" dirty="0">
                         <a:latin typeface="Calibri" charset="0"/>
@@ -11634,7 +11634,7 @@
                           <a:ea typeface="Calibri" pitchFamily="34" charset="-122"/>
                           <a:cs typeface="Calibri" pitchFamily="34" charset="-120"/>
                         </a:rPr>
-                        <a:t>0.03%</a:t>
+                        <a:t>2.97%</a:t>
                       </a:r>
                       <a:endParaRPr lang="en-US" sz="500" dirty="0">
                         <a:latin typeface="Calibri" charset="0"/>
@@ -12862,7 +12862,7 @@
                           <a:ea typeface="Calibri" pitchFamily="34" charset="-122"/>
                           <a:cs typeface="Calibri" pitchFamily="34" charset="-120"/>
                         </a:rPr>
-                        <a:t>0.00%</a:t>
+                        <a:t>0.14%</a:t>
                       </a:r>
                       <a:endParaRPr lang="en-US" sz="500" dirty="0">
                         <a:latin typeface="Calibri" charset="0"/>
@@ -12927,7 +12927,7 @@
                           <a:ea typeface="Calibri" pitchFamily="34" charset="-122"/>
                           <a:cs typeface="Calibri" pitchFamily="34" charset="-120"/>
                         </a:rPr>
-                        <a:t>0.00%</a:t>
+                        <a:t>0.14%</a:t>
                       </a:r>
                       <a:endParaRPr lang="en-US" sz="500" dirty="0">
                         <a:latin typeface="Calibri" charset="0"/>
@@ -12992,7 +12992,7 @@
                           <a:ea typeface="Calibri" pitchFamily="34" charset="-122"/>
                           <a:cs typeface="Calibri" pitchFamily="34" charset="-120"/>
                         </a:rPr>
-                        <a:t>0.00%</a:t>
+                        <a:t>0.14%</a:t>
                       </a:r>
                       <a:endParaRPr lang="en-US" sz="500" dirty="0">
                         <a:latin typeface="Calibri" charset="0"/>
@@ -13057,7 +13057,7 @@
                           <a:ea typeface="Calibri" pitchFamily="34" charset="-122"/>
                           <a:cs typeface="Calibri" pitchFamily="34" charset="-120"/>
                         </a:rPr>
-                        <a:t>0.00%</a:t>
+                        <a:t>0.13%</a:t>
                       </a:r>
                       <a:endParaRPr lang="en-US" sz="500" dirty="0">
                         <a:latin typeface="Calibri" charset="0"/>
@@ -13122,7 +13122,7 @@
                           <a:ea typeface="Calibri" pitchFamily="34" charset="-122"/>
                           <a:cs typeface="Calibri" pitchFamily="34" charset="-120"/>
                         </a:rPr>
-                        <a:t>0.00%</a:t>
+                        <a:t>0.12%</a:t>
                       </a:r>
                       <a:endParaRPr lang="en-US" sz="500" dirty="0">
                         <a:latin typeface="Calibri" charset="0"/>
@@ -13187,7 +13187,7 @@
                           <a:ea typeface="Calibri" pitchFamily="34" charset="-122"/>
                           <a:cs typeface="Calibri" pitchFamily="34" charset="-120"/>
                         </a:rPr>
-                        <a:t>0.00%</a:t>
+                        <a:t>0.10%</a:t>
                       </a:r>
                       <a:endParaRPr lang="en-US" sz="500" dirty="0">
                         <a:latin typeface="Calibri" charset="0"/>
@@ -13252,7 +13252,7 @@
                           <a:ea typeface="Calibri" pitchFamily="34" charset="-122"/>
                           <a:cs typeface="Calibri" pitchFamily="34" charset="-120"/>
                         </a:rPr>
-                        <a:t>0.00%</a:t>
+                        <a:t>0.09%</a:t>
                       </a:r>
                       <a:endParaRPr lang="en-US" sz="500" dirty="0">
                         <a:latin typeface="Calibri" charset="0"/>
@@ -13317,7 +13317,7 @@
                           <a:ea typeface="Calibri" pitchFamily="34" charset="-122"/>
                           <a:cs typeface="Calibri" pitchFamily="34" charset="-120"/>
                         </a:rPr>
-                        <a:t>0.00%</a:t>
+                        <a:t>0.11%</a:t>
                       </a:r>
                       <a:endParaRPr lang="en-US" sz="500" dirty="0">
                         <a:latin typeface="Calibri" charset="0"/>
@@ -13382,7 +13382,7 @@
                           <a:ea typeface="Calibri" pitchFamily="34" charset="-122"/>
                           <a:cs typeface="Calibri" pitchFamily="34" charset="-120"/>
                         </a:rPr>
-                        <a:t>0.00%</a:t>
+                        <a:t>0.06%</a:t>
                       </a:r>
                       <a:endParaRPr lang="en-US" sz="500" dirty="0">
                         <a:latin typeface="Calibri" charset="0"/>
@@ -13447,7 +13447,7 @@
                           <a:ea typeface="Calibri" pitchFamily="34" charset="-122"/>
                           <a:cs typeface="Calibri" pitchFamily="34" charset="-120"/>
                         </a:rPr>
-                        <a:t>0.00%</a:t>
+                        <a:t>0.07%</a:t>
                       </a:r>
                       <a:endParaRPr lang="en-US" sz="500" dirty="0">
                         <a:latin typeface="Calibri" charset="0"/>
@@ -13577,7 +13577,7 @@
                           <a:ea typeface="Calibri" pitchFamily="34" charset="-122"/>
                           <a:cs typeface="Calibri" pitchFamily="34" charset="-120"/>
                         </a:rPr>
-                        <a:t>2.92%</a:t>
+                        <a:t>4.05%</a:t>
                       </a:r>
                       <a:endParaRPr lang="en-US" sz="500" dirty="0">
                         <a:latin typeface="Calibri" charset="0"/>
@@ -13763,7 +13763,7 @@
                           <a:ea typeface="Calibri" pitchFamily="34" charset="-122"/>
                           <a:cs typeface="Calibri" pitchFamily="34" charset="-120"/>
                         </a:rPr>
-                        <a:t>0.00%</a:t>
+                        <a:t>0.22%</a:t>
                       </a:r>
                       <a:endParaRPr lang="en-US" sz="500" dirty="0">
                         <a:latin typeface="Calibri" charset="0"/>
@@ -13828,7 +13828,7 @@
                           <a:ea typeface="Calibri" pitchFamily="34" charset="-122"/>
                           <a:cs typeface="Calibri" pitchFamily="34" charset="-120"/>
                         </a:rPr>
-                        <a:t>0.00%</a:t>
+                        <a:t>0.21%</a:t>
                       </a:r>
                       <a:endParaRPr lang="en-US" sz="500" dirty="0">
                         <a:latin typeface="Calibri" charset="0"/>
@@ -13893,7 +13893,7 @@
                           <a:ea typeface="Calibri" pitchFamily="34" charset="-122"/>
                           <a:cs typeface="Calibri" pitchFamily="34" charset="-120"/>
                         </a:rPr>
-                        <a:t>0.00%</a:t>
+                        <a:t>0.21%</a:t>
                       </a:r>
                       <a:endParaRPr lang="en-US" sz="500" dirty="0">
                         <a:latin typeface="Calibri" charset="0"/>
@@ -13958,7 +13958,7 @@
                           <a:ea typeface="Calibri" pitchFamily="34" charset="-122"/>
                           <a:cs typeface="Calibri" pitchFamily="34" charset="-120"/>
                         </a:rPr>
-                        <a:t>0.00%</a:t>
+                        <a:t>0.25%</a:t>
                       </a:r>
                       <a:endParaRPr lang="en-US" sz="500" dirty="0">
                         <a:latin typeface="Calibri" charset="0"/>
@@ -14023,7 +14023,7 @@
                           <a:ea typeface="Calibri" pitchFamily="34" charset="-122"/>
                           <a:cs typeface="Calibri" pitchFamily="34" charset="-120"/>
                         </a:rPr>
-                        <a:t>0.00%</a:t>
+                        <a:t>0.23%</a:t>
                       </a:r>
                       <a:endParaRPr lang="en-US" sz="500" dirty="0">
                         <a:latin typeface="Calibri" charset="0"/>
@@ -14088,7 +14088,7 @@
                           <a:ea typeface="Calibri" pitchFamily="34" charset="-122"/>
                           <a:cs typeface="Calibri" pitchFamily="34" charset="-120"/>
                         </a:rPr>
-                        <a:t>0.00%</a:t>
+                        <a:t>0.25%</a:t>
                       </a:r>
                       <a:endParaRPr lang="en-US" sz="500" dirty="0">
                         <a:latin typeface="Calibri" charset="0"/>
@@ -14153,7 +14153,7 @@
                           <a:ea typeface="Calibri" pitchFamily="34" charset="-122"/>
                           <a:cs typeface="Calibri" pitchFamily="34" charset="-120"/>
                         </a:rPr>
-                        <a:t>0.00%</a:t>
+                        <a:t>0.21%</a:t>
                       </a:r>
                       <a:endParaRPr lang="en-US" sz="500" dirty="0">
                         <a:latin typeface="Calibri" charset="0"/>
@@ -14218,7 +14218,7 @@
                           <a:ea typeface="Calibri" pitchFamily="34" charset="-122"/>
                           <a:cs typeface="Calibri" pitchFamily="34" charset="-120"/>
                         </a:rPr>
-                        <a:t>0.00%</a:t>
+                        <a:t>0.19%</a:t>
                       </a:r>
                       <a:endParaRPr lang="en-US" sz="500" dirty="0">
                         <a:latin typeface="Calibri" charset="0"/>
@@ -14283,7 +14283,7 @@
                           <a:ea typeface="Calibri" pitchFamily="34" charset="-122"/>
                           <a:cs typeface="Calibri" pitchFamily="34" charset="-120"/>
                         </a:rPr>
-                        <a:t>0.00%</a:t>
+                        <a:t>0.18%</a:t>
                       </a:r>
                       <a:endParaRPr lang="en-US" sz="500" dirty="0">
                         <a:latin typeface="Calibri" charset="0"/>
@@ -14348,7 +14348,7 @@
                           <a:ea typeface="Calibri" pitchFamily="34" charset="-122"/>
                           <a:cs typeface="Calibri" pitchFamily="34" charset="-120"/>
                         </a:rPr>
-                        <a:t>0.00%</a:t>
+                        <a:t>0.25%</a:t>
                       </a:r>
                       <a:endParaRPr lang="en-US" sz="500" dirty="0">
                         <a:latin typeface="Calibri" charset="0"/>
@@ -14413,7 +14413,7 @@
                           <a:ea typeface="Calibri" pitchFamily="34" charset="-122"/>
                           <a:cs typeface="Calibri" pitchFamily="34" charset="-120"/>
                         </a:rPr>
-                        <a:t>0.00%</a:t>
+                        <a:t>0.24%</a:t>
                       </a:r>
                       <a:endParaRPr lang="en-US" sz="500" dirty="0">
                         <a:latin typeface="Calibri" charset="0"/>
@@ -14478,7 +14478,7 @@
                           <a:ea typeface="Calibri" pitchFamily="34" charset="-122"/>
                           <a:cs typeface="Calibri" pitchFamily="34" charset="-120"/>
                         </a:rPr>
-                        <a:t>0.00%</a:t>
+                        <a:t>0.24%</a:t>
                       </a:r>
                       <a:endParaRPr lang="en-US" sz="500" dirty="0">
                         <a:latin typeface="Calibri" charset="0"/>
@@ -14543,7 +14543,7 @@
                           <a:ea typeface="Calibri" pitchFamily="34" charset="-122"/>
                           <a:cs typeface="Calibri" pitchFamily="34" charset="-120"/>
                         </a:rPr>
-                        <a:t>0.03%</a:t>
+                        <a:t>2.72%</a:t>
                       </a:r>
                       <a:endParaRPr lang="en-US" sz="500" dirty="0">
                         <a:latin typeface="Calibri" charset="0"/>
@@ -15771,7 +15771,7 @@
                           <a:ea typeface="Calibri" pitchFamily="34" charset="-122"/>
                           <a:cs typeface="Calibri" pitchFamily="34" charset="-120"/>
                         </a:rPr>
-                        <a:t>0.00%</a:t>
+                        <a:t>0.05%</a:t>
                       </a:r>
                       <a:endParaRPr lang="en-US" sz="500" dirty="0">
                         <a:latin typeface="Calibri" charset="0"/>
@@ -15836,7 +15836,7 @@
                           <a:ea typeface="Calibri" pitchFamily="34" charset="-122"/>
                           <a:cs typeface="Calibri" pitchFamily="34" charset="-120"/>
                         </a:rPr>
-                        <a:t>0.00%</a:t>
+                        <a:t>0.09%</a:t>
                       </a:r>
                       <a:endParaRPr lang="en-US" sz="500" dirty="0">
                         <a:latin typeface="Calibri" charset="0"/>
@@ -15901,7 +15901,7 @@
                           <a:ea typeface="Calibri" pitchFamily="34" charset="-122"/>
                           <a:cs typeface="Calibri" pitchFamily="34" charset="-120"/>
                         </a:rPr>
-                        <a:t>0.00%</a:t>
+                        <a:t>0.22%</a:t>
                       </a:r>
                       <a:endParaRPr lang="en-US" sz="500" dirty="0">
                         <a:latin typeface="Calibri" charset="0"/>
@@ -15966,7 +15966,7 @@
                           <a:ea typeface="Calibri" pitchFamily="34" charset="-122"/>
                           <a:cs typeface="Calibri" pitchFamily="34" charset="-120"/>
                         </a:rPr>
-                        <a:t>0.00%</a:t>
+                        <a:t>0.03%</a:t>
                       </a:r>
                       <a:endParaRPr lang="en-US" sz="500" dirty="0">
                         <a:latin typeface="Calibri" charset="0"/>
@@ -16031,7 +16031,7 @@
                           <a:ea typeface="Calibri" pitchFamily="34" charset="-122"/>
                           <a:cs typeface="Calibri" pitchFamily="34" charset="-120"/>
                         </a:rPr>
-                        <a:t>0.00%</a:t>
+                        <a:t>0.01%</a:t>
                       </a:r>
                       <a:endParaRPr lang="en-US" sz="500" dirty="0">
                         <a:latin typeface="Calibri" charset="0"/>
@@ -16096,7 +16096,7 @@
                           <a:ea typeface="Calibri" pitchFamily="34" charset="-122"/>
                           <a:cs typeface="Calibri" pitchFamily="34" charset="-120"/>
                         </a:rPr>
-                        <a:t>0.00%</a:t>
+                        <a:t>0.01%</a:t>
                       </a:r>
                       <a:endParaRPr lang="en-US" sz="500" dirty="0">
                         <a:latin typeface="Calibri" charset="0"/>
@@ -16161,7 +16161,7 @@
                           <a:ea typeface="Calibri" pitchFamily="34" charset="-122"/>
                           <a:cs typeface="Calibri" pitchFamily="34" charset="-120"/>
                         </a:rPr>
-                        <a:t>0.00%</a:t>
+                        <a:t>0.01%</a:t>
                       </a:r>
                       <a:endParaRPr lang="en-US" sz="500" dirty="0">
                         <a:latin typeface="Calibri" charset="0"/>
@@ -16226,7 +16226,7 @@
                           <a:ea typeface="Calibri" pitchFamily="34" charset="-122"/>
                           <a:cs typeface="Calibri" pitchFamily="34" charset="-120"/>
                         </a:rPr>
-                        <a:t>0.00%</a:t>
+                        <a:t>0.01%</a:t>
                       </a:r>
                       <a:endParaRPr lang="en-US" sz="500" dirty="0">
                         <a:latin typeface="Calibri" charset="0"/>
@@ -16291,7 +16291,7 @@
                           <a:ea typeface="Calibri" pitchFamily="34" charset="-122"/>
                           <a:cs typeface="Calibri" pitchFamily="34" charset="-120"/>
                         </a:rPr>
-                        <a:t>0.00%</a:t>
+                        <a:t>0.01%</a:t>
                       </a:r>
                       <a:endParaRPr lang="en-US" sz="500" dirty="0">
                         <a:latin typeface="Calibri" charset="0"/>
@@ -16356,7 +16356,7 @@
                           <a:ea typeface="Calibri" pitchFamily="34" charset="-122"/>
                           <a:cs typeface="Calibri" pitchFamily="34" charset="-120"/>
                         </a:rPr>
-                        <a:t>0.00%</a:t>
+                        <a:t>0.01%</a:t>
                       </a:r>
                       <a:endParaRPr lang="en-US" sz="500" dirty="0">
                         <a:latin typeface="Calibri" charset="0"/>
@@ -16486,7 +16486,7 @@
                           <a:ea typeface="Calibri" pitchFamily="34" charset="-122"/>
                           <a:cs typeface="Calibri" pitchFamily="34" charset="-120"/>
                         </a:rPr>
-                        <a:t>0.89%</a:t>
+                        <a:t>1.33%</a:t>
                       </a:r>
                       <a:endParaRPr lang="en-US" sz="500" dirty="0">
                         <a:latin typeface="Calibri" charset="0"/>
@@ -16672,7 +16672,7 @@
                           <a:ea typeface="Calibri" pitchFamily="34" charset="-122"/>
                           <a:cs typeface="Calibri" pitchFamily="34" charset="-120"/>
                         </a:rPr>
-                        <a:t>0.00%</a:t>
+                        <a:t>0.11%</a:t>
                       </a:r>
                       <a:endParaRPr lang="en-US" sz="500" dirty="0">
                         <a:latin typeface="Calibri" charset="0"/>
@@ -16737,7 +16737,7 @@
                           <a:ea typeface="Calibri" pitchFamily="34" charset="-122"/>
                           <a:cs typeface="Calibri" pitchFamily="34" charset="-120"/>
                         </a:rPr>
-                        <a:t>0.00%</a:t>
+                        <a:t>0.14%</a:t>
                       </a:r>
                       <a:endParaRPr lang="en-US" sz="500" dirty="0">
                         <a:latin typeface="Calibri" charset="0"/>
@@ -16802,7 +16802,7 @@
                           <a:ea typeface="Calibri" pitchFamily="34" charset="-122"/>
                           <a:cs typeface="Calibri" pitchFamily="34" charset="-120"/>
                         </a:rPr>
-                        <a:t>0.00%</a:t>
+                        <a:t>0.14%</a:t>
                       </a:r>
                       <a:endParaRPr lang="en-US" sz="500" dirty="0">
                         <a:latin typeface="Calibri" charset="0"/>
@@ -16867,7 +16867,7 @@
                           <a:ea typeface="Calibri" pitchFamily="34" charset="-122"/>
                           <a:cs typeface="Calibri" pitchFamily="34" charset="-120"/>
                         </a:rPr>
-                        <a:t>0.00%</a:t>
+                        <a:t>0.13%</a:t>
                       </a:r>
                       <a:endParaRPr lang="en-US" sz="500" dirty="0">
                         <a:latin typeface="Calibri" charset="0"/>
@@ -16932,7 +16932,7 @@
                           <a:ea typeface="Calibri" pitchFamily="34" charset="-122"/>
                           <a:cs typeface="Calibri" pitchFamily="34" charset="-120"/>
                         </a:rPr>
-                        <a:t>0.00%</a:t>
+                        <a:t>0.11%</a:t>
                       </a:r>
                       <a:endParaRPr lang="en-US" sz="500" dirty="0">
                         <a:latin typeface="Calibri" charset="0"/>
@@ -16997,7 +16997,7 @@
                           <a:ea typeface="Calibri" pitchFamily="34" charset="-122"/>
                           <a:cs typeface="Calibri" pitchFamily="34" charset="-120"/>
                         </a:rPr>
-                        <a:t>0.00%</a:t>
+                        <a:t>0.11%</a:t>
                       </a:r>
                       <a:endParaRPr lang="en-US" sz="500" dirty="0">
                         <a:latin typeface="Calibri" charset="0"/>
@@ -17062,7 +17062,7 @@
                           <a:ea typeface="Calibri" pitchFamily="34" charset="-122"/>
                           <a:cs typeface="Calibri" pitchFamily="34" charset="-120"/>
                         </a:rPr>
-                        <a:t>0.00%</a:t>
+                        <a:t>0.06%</a:t>
                       </a:r>
                       <a:endParaRPr lang="en-US" sz="500" dirty="0">
                         <a:latin typeface="Calibri" charset="0"/>
@@ -17127,7 +17127,7 @@
                           <a:ea typeface="Calibri" pitchFamily="34" charset="-122"/>
                           <a:cs typeface="Calibri" pitchFamily="34" charset="-120"/>
                         </a:rPr>
-                        <a:t>0.00%</a:t>
+                        <a:t>0.06%</a:t>
                       </a:r>
                       <a:endParaRPr lang="en-US" sz="500" dirty="0">
                         <a:latin typeface="Calibri" charset="0"/>
@@ -17192,7 +17192,7 @@
                           <a:ea typeface="Calibri" pitchFamily="34" charset="-122"/>
                           <a:cs typeface="Calibri" pitchFamily="34" charset="-120"/>
                         </a:rPr>
-                        <a:t>0.00%</a:t>
+                        <a:t>0.09%</a:t>
                       </a:r>
                       <a:endParaRPr lang="en-US" sz="500" dirty="0">
                         <a:latin typeface="Calibri" charset="0"/>
@@ -17257,7 +17257,7 @@
                           <a:ea typeface="Calibri" pitchFamily="34" charset="-122"/>
                           <a:cs typeface="Calibri" pitchFamily="34" charset="-120"/>
                         </a:rPr>
-                        <a:t>0.00%</a:t>
+                        <a:t>0.12%</a:t>
                       </a:r>
                       <a:endParaRPr lang="en-US" sz="500" dirty="0">
                         <a:latin typeface="Calibri" charset="0"/>
@@ -17322,7 +17322,7 @@
                           <a:ea typeface="Calibri" pitchFamily="34" charset="-122"/>
                           <a:cs typeface="Calibri" pitchFamily="34" charset="-120"/>
                         </a:rPr>
-                        <a:t>0.00%</a:t>
+                        <a:t>0.11%</a:t>
                       </a:r>
                       <a:endParaRPr lang="en-US" sz="500" dirty="0">
                         <a:latin typeface="Calibri" charset="0"/>
@@ -17387,7 +17387,7 @@
                           <a:ea typeface="Calibri" pitchFamily="34" charset="-122"/>
                           <a:cs typeface="Calibri" pitchFamily="34" charset="-120"/>
                         </a:rPr>
-                        <a:t>0.01%</a:t>
+                        <a:t>0.52%</a:t>
                       </a:r>
                       <a:endParaRPr lang="en-US" sz="500" dirty="0">
                         <a:latin typeface="Calibri" charset="0"/>
@@ -17452,7 +17452,7 @@
                           <a:ea typeface="Calibri" pitchFamily="34" charset="-122"/>
                           <a:cs typeface="Calibri" pitchFamily="34" charset="-120"/>
                         </a:rPr>
-                        <a:t>0.02%</a:t>
+                        <a:t>1.72%</a:t>
                       </a:r>
                       <a:endParaRPr lang="en-US" sz="500" dirty="0">
                         <a:latin typeface="Calibri" charset="0"/>
@@ -18680,7 +18680,7 @@
                           <a:ea typeface="Calibri" pitchFamily="34" charset="-122"/>
                           <a:cs typeface="Calibri" pitchFamily="34" charset="-120"/>
                         </a:rPr>
-                        <a:t>0.00%</a:t>
+                        <a:t>0.01%</a:t>
                       </a:r>
                       <a:endParaRPr lang="en-US" sz="500" dirty="0">
                         <a:latin typeface="Calibri" charset="0"/>
@@ -18745,7 +18745,7 @@
                           <a:ea typeface="Calibri" pitchFamily="34" charset="-122"/>
                           <a:cs typeface="Calibri" pitchFamily="34" charset="-120"/>
                         </a:rPr>
-                        <a:t>0.00%</a:t>
+                        <a:t>0.01%</a:t>
                       </a:r>
                       <a:endParaRPr lang="en-US" sz="500" dirty="0">
                         <a:latin typeface="Calibri" charset="0"/>
@@ -18810,7 +18810,7 @@
                           <a:ea typeface="Calibri" pitchFamily="34" charset="-122"/>
                           <a:cs typeface="Calibri" pitchFamily="34" charset="-120"/>
                         </a:rPr>
-                        <a:t>0.00%</a:t>
+                        <a:t>0.01%</a:t>
                       </a:r>
                       <a:endParaRPr lang="en-US" sz="500" dirty="0">
                         <a:latin typeface="Calibri" charset="0"/>
@@ -18875,7 +18875,7 @@
                           <a:ea typeface="Calibri" pitchFamily="34" charset="-122"/>
                           <a:cs typeface="Calibri" pitchFamily="34" charset="-120"/>
                         </a:rPr>
-                        <a:t>0.00%</a:t>
+                        <a:t>0.01%</a:t>
                       </a:r>
                       <a:endParaRPr lang="en-US" sz="500" dirty="0">
                         <a:latin typeface="Calibri" charset="0"/>
@@ -18940,7 +18940,7 @@
                           <a:ea typeface="Calibri" pitchFamily="34" charset="-122"/>
                           <a:cs typeface="Calibri" pitchFamily="34" charset="-120"/>
                         </a:rPr>
-                        <a:t>0.00%</a:t>
+                        <a:t>0.01%</a:t>
                       </a:r>
                       <a:endParaRPr lang="en-US" sz="500" dirty="0">
                         <a:latin typeface="Calibri" charset="0"/>
@@ -19005,7 +19005,7 @@
                           <a:ea typeface="Calibri" pitchFamily="34" charset="-122"/>
                           <a:cs typeface="Calibri" pitchFamily="34" charset="-120"/>
                         </a:rPr>
-                        <a:t>0.00%</a:t>
+                        <a:t>0.01%</a:t>
                       </a:r>
                       <a:endParaRPr lang="en-US" sz="500" dirty="0">
                         <a:latin typeface="Calibri" charset="0"/>
@@ -19070,7 +19070,7 @@
                           <a:ea typeface="Calibri" pitchFamily="34" charset="-122"/>
                           <a:cs typeface="Calibri" pitchFamily="34" charset="-120"/>
                         </a:rPr>
-                        <a:t>0.00%</a:t>
+                        <a:t>0.01%</a:t>
                       </a:r>
                       <a:endParaRPr lang="en-US" sz="500" dirty="0">
                         <a:latin typeface="Calibri" charset="0"/>
@@ -19135,7 +19135,7 @@
                           <a:ea typeface="Calibri" pitchFamily="34" charset="-122"/>
                           <a:cs typeface="Calibri" pitchFamily="34" charset="-120"/>
                         </a:rPr>
-                        <a:t>-0.00%</a:t>
+                        <a:t>-0.01%</a:t>
                       </a:r>
                       <a:endParaRPr lang="en-US" sz="500" dirty="0">
                         <a:latin typeface="Calibri" charset="0"/>
@@ -19200,7 +19200,7 @@
                           <a:ea typeface="Calibri" pitchFamily="34" charset="-122"/>
                           <a:cs typeface="Calibri" pitchFamily="34" charset="-120"/>
                         </a:rPr>
-                        <a:t>0.00%</a:t>
+                        <a:t>0.10%</a:t>
                       </a:r>
                       <a:endParaRPr lang="en-US" sz="500" dirty="0">
                         <a:latin typeface="Calibri" charset="0"/>
@@ -19265,7 +19265,7 @@
                           <a:ea typeface="Calibri" pitchFamily="34" charset="-122"/>
                           <a:cs typeface="Calibri" pitchFamily="34" charset="-120"/>
                         </a:rPr>
-                        <a:t>0.00%</a:t>
+                        <a:t>0.13%</a:t>
                       </a:r>
                       <a:endParaRPr lang="en-US" sz="500" dirty="0">
                         <a:latin typeface="Calibri" charset="0"/>
@@ -19395,7 +19395,7 @@
                           <a:ea typeface="Calibri" pitchFamily="34" charset="-122"/>
                           <a:cs typeface="Calibri" pitchFamily="34" charset="-120"/>
                         </a:rPr>
-                        <a:t>0.60%</a:t>
+                        <a:t>0.85%</a:t>
                       </a:r>
                       <a:endParaRPr lang="en-US" sz="500" dirty="0">
                         <a:latin typeface="Calibri" charset="0"/>
@@ -19581,7 +19581,7 @@
                           <a:ea typeface="Calibri" pitchFamily="34" charset="-122"/>
                           <a:cs typeface="Calibri" pitchFamily="34" charset="-120"/>
                         </a:rPr>
-                        <a:t>0.00%</a:t>
+                        <a:t>0.10%</a:t>
                       </a:r>
                       <a:endParaRPr lang="en-US" sz="500" dirty="0">
                         <a:latin typeface="Calibri" charset="0"/>
@@ -19646,7 +19646,7 @@
                           <a:ea typeface="Calibri" pitchFamily="34" charset="-122"/>
                           <a:cs typeface="Calibri" pitchFamily="34" charset="-120"/>
                         </a:rPr>
-                        <a:t>0.00%</a:t>
+                        <a:t>0.11%</a:t>
                       </a:r>
                       <a:endParaRPr lang="en-US" sz="500" dirty="0">
                         <a:latin typeface="Calibri" charset="0"/>
@@ -19711,7 +19711,7 @@
                           <a:ea typeface="Calibri" pitchFamily="34" charset="-122"/>
                           <a:cs typeface="Calibri" pitchFamily="34" charset="-120"/>
                         </a:rPr>
-                        <a:t>0.00%</a:t>
+                        <a:t>0.05%</a:t>
                       </a:r>
                       <a:endParaRPr lang="en-US" sz="500" dirty="0">
                         <a:latin typeface="Calibri" charset="0"/>
@@ -19776,7 +19776,7 @@
                           <a:ea typeface="Calibri" pitchFamily="34" charset="-122"/>
                           <a:cs typeface="Calibri" pitchFamily="34" charset="-120"/>
                         </a:rPr>
-                        <a:t>0.00%</a:t>
+                        <a:t>0.02%</a:t>
                       </a:r>
                       <a:endParaRPr lang="en-US" sz="500" dirty="0">
                         <a:latin typeface="Calibri" charset="0"/>
@@ -19841,7 +19841,7 @@
                           <a:ea typeface="Calibri" pitchFamily="34" charset="-122"/>
                           <a:cs typeface="Calibri" pitchFamily="34" charset="-120"/>
                         </a:rPr>
-                        <a:t>0.00%</a:t>
+                        <a:t>0.11%</a:t>
                       </a:r>
                       <a:endParaRPr lang="en-US" sz="500" dirty="0">
                         <a:latin typeface="Calibri" charset="0"/>
@@ -19906,7 +19906,7 @@
                           <a:ea typeface="Calibri" pitchFamily="34" charset="-122"/>
                           <a:cs typeface="Calibri" pitchFamily="34" charset="-120"/>
                         </a:rPr>
-                        <a:t>0.00%</a:t>
+                        <a:t>0.13%</a:t>
                       </a:r>
                       <a:endParaRPr lang="en-US" sz="500" dirty="0">
                         <a:latin typeface="Calibri" charset="0"/>
@@ -19971,7 +19971,7 @@
                           <a:ea typeface="Calibri" pitchFamily="34" charset="-122"/>
                           <a:cs typeface="Calibri" pitchFamily="34" charset="-120"/>
                         </a:rPr>
-                        <a:t>0.00%</a:t>
+                        <a:t>0.13%</a:t>
                       </a:r>
                       <a:endParaRPr lang="en-US" sz="500" dirty="0">
                         <a:latin typeface="Calibri" charset="0"/>
@@ -20036,7 +20036,7 @@
                           <a:ea typeface="Calibri" pitchFamily="34" charset="-122"/>
                           <a:cs typeface="Calibri" pitchFamily="34" charset="-120"/>
                         </a:rPr>
-                        <a:t>0.00%</a:t>
+                        <a:t>0.11%</a:t>
                       </a:r>
                       <a:endParaRPr lang="en-US" sz="500" dirty="0">
                         <a:latin typeface="Calibri" charset="0"/>
@@ -20101,7 +20101,7 @@
                           <a:ea typeface="Calibri" pitchFamily="34" charset="-122"/>
                           <a:cs typeface="Calibri" pitchFamily="34" charset="-120"/>
                         </a:rPr>
-                        <a:t>0.00%</a:t>
+                        <a:t>0.09%</a:t>
                       </a:r>
                       <a:endParaRPr lang="en-US" sz="500" dirty="0">
                         <a:latin typeface="Calibri" charset="0"/>
@@ -20166,7 +20166,7 @@
                           <a:ea typeface="Calibri" pitchFamily="34" charset="-122"/>
                           <a:cs typeface="Calibri" pitchFamily="34" charset="-120"/>
                         </a:rPr>
-                        <a:t>0.00%</a:t>
+                        <a:t>0.08%</a:t>
                       </a:r>
                       <a:endParaRPr lang="en-US" sz="500" dirty="0">
                         <a:latin typeface="Calibri" charset="0"/>
@@ -20231,7 +20231,7 @@
                           <a:ea typeface="Calibri" pitchFamily="34" charset="-122"/>
                           <a:cs typeface="Calibri" pitchFamily="34" charset="-120"/>
                         </a:rPr>
-                        <a:t>0.00%</a:t>
+                        <a:t>0.04%</a:t>
                       </a:r>
                       <a:endParaRPr lang="en-US" sz="500" dirty="0">
                         <a:latin typeface="Calibri" charset="0"/>
@@ -20296,7 +20296,7 @@
                           <a:ea typeface="Calibri" pitchFamily="34" charset="-122"/>
                           <a:cs typeface="Calibri" pitchFamily="34" charset="-120"/>
                         </a:rPr>
-                        <a:t>0.00%</a:t>
+                        <a:t>0.16%</a:t>
                       </a:r>
                       <a:endParaRPr lang="en-US" sz="500" dirty="0">
                         <a:latin typeface="Calibri" charset="0"/>
@@ -20361,7 +20361,7 @@
                           <a:ea typeface="Calibri" pitchFamily="34" charset="-122"/>
                           <a:cs typeface="Calibri" pitchFamily="34" charset="-120"/>
                         </a:rPr>
-                        <a:t>0.01%</a:t>
+                        <a:t>1.13%</a:t>
                       </a:r>
                       <a:endParaRPr lang="en-US" sz="500" dirty="0">
                         <a:latin typeface="Calibri" charset="0"/>
@@ -21589,7 +21589,7 @@
                           <a:ea typeface="Calibri" pitchFamily="34" charset="-122"/>
                           <a:cs typeface="Calibri" pitchFamily="34" charset="-120"/>
                         </a:rPr>
-                        <a:t>0.00%</a:t>
+                        <a:t>0.35%</a:t>
                       </a:r>
                       <a:endParaRPr lang="en-US" sz="500" dirty="0">
                         <a:latin typeface="Calibri" charset="0"/>
@@ -21654,7 +21654,7 @@
                           <a:ea typeface="Calibri" pitchFamily="34" charset="-122"/>
                           <a:cs typeface="Calibri" pitchFamily="34" charset="-120"/>
                         </a:rPr>
-                        <a:t>0.00%</a:t>
+                        <a:t>0.37%</a:t>
                       </a:r>
                       <a:endParaRPr lang="en-US" sz="500" dirty="0">
                         <a:latin typeface="Calibri" charset="0"/>
@@ -21719,7 +21719,7 @@
                           <a:ea typeface="Calibri" pitchFamily="34" charset="-122"/>
                           <a:cs typeface="Calibri" pitchFamily="34" charset="-120"/>
                         </a:rPr>
-                        <a:t>0.00%</a:t>
+                        <a:t>0.46%</a:t>
                       </a:r>
                       <a:endParaRPr lang="en-US" sz="500" dirty="0">
                         <a:latin typeface="Calibri" charset="0"/>
@@ -21784,7 +21784,7 @@
                           <a:ea typeface="Calibri" pitchFamily="34" charset="-122"/>
                           <a:cs typeface="Calibri" pitchFamily="34" charset="-120"/>
                         </a:rPr>
-                        <a:t>0.01%</a:t>
+                        <a:t>0.53%</a:t>
                       </a:r>
                       <a:endParaRPr lang="en-US" sz="500" dirty="0">
                         <a:latin typeface="Calibri" charset="0"/>
@@ -21849,7 +21849,7 @@
                           <a:ea typeface="Calibri" pitchFamily="34" charset="-122"/>
                           <a:cs typeface="Calibri" pitchFamily="34" charset="-120"/>
                         </a:rPr>
-                        <a:t>0.01%</a:t>
+                        <a:t>0.59%</a:t>
                       </a:r>
                       <a:endParaRPr lang="en-US" sz="500" dirty="0">
                         <a:latin typeface="Calibri" charset="0"/>
@@ -21914,7 +21914,7 @@
                           <a:ea typeface="Calibri" pitchFamily="34" charset="-122"/>
                           <a:cs typeface="Calibri" pitchFamily="34" charset="-120"/>
                         </a:rPr>
-                        <a:t>0.01%</a:t>
+                        <a:t>0.63%</a:t>
                       </a:r>
                       <a:endParaRPr lang="en-US" sz="500" dirty="0">
                         <a:latin typeface="Calibri" charset="0"/>
@@ -21979,7 +21979,7 @@
                           <a:ea typeface="Calibri" pitchFamily="34" charset="-122"/>
                           <a:cs typeface="Calibri" pitchFamily="34" charset="-120"/>
                         </a:rPr>
-                        <a:t>0.01%</a:t>
+                        <a:t>0.68%</a:t>
                       </a:r>
                       <a:endParaRPr lang="en-US" sz="500" dirty="0">
                         <a:latin typeface="Calibri" charset="0"/>
@@ -22044,7 +22044,7 @@
                           <a:ea typeface="Calibri" pitchFamily="34" charset="-122"/>
                           <a:cs typeface="Calibri" pitchFamily="34" charset="-120"/>
                         </a:rPr>
-                        <a:t>0.01%</a:t>
+                        <a:t>0.73%</a:t>
                       </a:r>
                       <a:endParaRPr lang="en-US" sz="500" dirty="0">
                         <a:latin typeface="Calibri" charset="0"/>
@@ -22109,7 +22109,7 @@
                           <a:ea typeface="Calibri" pitchFamily="34" charset="-122"/>
                           <a:cs typeface="Calibri" pitchFamily="34" charset="-120"/>
                         </a:rPr>
-                        <a:t>0.01%</a:t>
+                        <a:t>0.78%</a:t>
                       </a:r>
                       <a:endParaRPr lang="en-US" sz="500" dirty="0">
                         <a:latin typeface="Calibri" charset="0"/>
@@ -22174,7 +22174,7 @@
                           <a:ea typeface="Calibri" pitchFamily="34" charset="-122"/>
                           <a:cs typeface="Calibri" pitchFamily="34" charset="-120"/>
                         </a:rPr>
-                        <a:t>0.01%</a:t>
+                        <a:t>0.79%</a:t>
                       </a:r>
                       <a:endParaRPr lang="en-US" sz="500" dirty="0">
                         <a:latin typeface="Calibri" charset="0"/>
@@ -22304,7 +22304,7 @@
                           <a:ea typeface="Calibri" pitchFamily="34" charset="-122"/>
                           <a:cs typeface="Calibri" pitchFamily="34" charset="-120"/>
                         </a:rPr>
-                        <a:t>8.50%</a:t>
+                        <a:t>15.02%</a:t>
                       </a:r>
                       <a:endParaRPr lang="en-US" sz="500" dirty="0">
                         <a:latin typeface="Calibri" charset="0"/>
@@ -22490,7 +22490,7 @@
                           <a:ea typeface="Calibri" pitchFamily="34" charset="-122"/>
                           <a:cs typeface="Calibri" pitchFamily="34" charset="-120"/>
                         </a:rPr>
-                        <a:t>0.00%</a:t>
+                        <a:t>0.23%</a:t>
                       </a:r>
                       <a:endParaRPr lang="en-US" sz="500" dirty="0">
                         <a:latin typeface="Calibri" charset="0"/>
@@ -22555,7 +22555,7 @@
                           <a:ea typeface="Calibri" pitchFamily="34" charset="-122"/>
                           <a:cs typeface="Calibri" pitchFamily="34" charset="-120"/>
                         </a:rPr>
-                        <a:t>0.00%</a:t>
+                        <a:t>0.36%</a:t>
                       </a:r>
                       <a:endParaRPr lang="en-US" sz="500" dirty="0">
                         <a:latin typeface="Calibri" charset="0"/>
@@ -22620,7 +22620,7 @@
                           <a:ea typeface="Calibri" pitchFamily="34" charset="-122"/>
                           <a:cs typeface="Calibri" pitchFamily="34" charset="-120"/>
                         </a:rPr>
-                        <a:t>0.00%</a:t>
+                        <a:t>0.36%</a:t>
                       </a:r>
                       <a:endParaRPr lang="en-US" sz="500" dirty="0">
                         <a:latin typeface="Calibri" charset="0"/>
@@ -22685,7 +22685,7 @@
                           <a:ea typeface="Calibri" pitchFamily="34" charset="-122"/>
                           <a:cs typeface="Calibri" pitchFamily="34" charset="-120"/>
                         </a:rPr>
-                        <a:t>0.01%</a:t>
+                        <a:t>0.54%</a:t>
                       </a:r>
                       <a:endParaRPr lang="en-US" sz="500" dirty="0">
                         <a:latin typeface="Calibri" charset="0"/>
@@ -22750,7 +22750,7 @@
                           <a:ea typeface="Calibri" pitchFamily="34" charset="-122"/>
                           <a:cs typeface="Calibri" pitchFamily="34" charset="-120"/>
                         </a:rPr>
-                        <a:t>0.01%</a:t>
+                        <a:t>0.71%</a:t>
                       </a:r>
                       <a:endParaRPr lang="en-US" sz="500" dirty="0">
                         <a:latin typeface="Calibri" charset="0"/>
@@ -22815,7 +22815,7 @@
                           <a:ea typeface="Calibri" pitchFamily="34" charset="-122"/>
                           <a:cs typeface="Calibri" pitchFamily="34" charset="-120"/>
                         </a:rPr>
-                        <a:t>0.01%</a:t>
+                        <a:t>0.69%</a:t>
                       </a:r>
                       <a:endParaRPr lang="en-US" sz="500" dirty="0">
                         <a:latin typeface="Calibri" charset="0"/>
@@ -22880,7 +22880,7 @@
                           <a:ea typeface="Calibri" pitchFamily="34" charset="-122"/>
                           <a:cs typeface="Calibri" pitchFamily="34" charset="-120"/>
                         </a:rPr>
-                        <a:t>0.01%</a:t>
+                        <a:t>0.67%</a:t>
                       </a:r>
                       <a:endParaRPr lang="en-US" sz="500" dirty="0">
                         <a:latin typeface="Calibri" charset="0"/>
@@ -22945,7 +22945,7 @@
                           <a:ea typeface="Calibri" pitchFamily="34" charset="-122"/>
                           <a:cs typeface="Calibri" pitchFamily="34" charset="-120"/>
                         </a:rPr>
-                        <a:t>0.01%</a:t>
+                        <a:t>0.74%</a:t>
                       </a:r>
                       <a:endParaRPr lang="en-US" sz="500" dirty="0">
                         <a:latin typeface="Calibri" charset="0"/>
@@ -23010,7 +23010,7 @@
                           <a:ea typeface="Calibri" pitchFamily="34" charset="-122"/>
                           <a:cs typeface="Calibri" pitchFamily="34" charset="-120"/>
                         </a:rPr>
-                        <a:t>0.01%</a:t>
+                        <a:t>0.80%</a:t>
                       </a:r>
                       <a:endParaRPr lang="en-US" sz="500" dirty="0">
                         <a:latin typeface="Calibri" charset="0"/>
@@ -23075,7 +23075,7 @@
                           <a:ea typeface="Calibri" pitchFamily="34" charset="-122"/>
                           <a:cs typeface="Calibri" pitchFamily="34" charset="-120"/>
                         </a:rPr>
-                        <a:t>0.01%</a:t>
+                        <a:t>0.85%</a:t>
                       </a:r>
                       <a:endParaRPr lang="en-US" sz="500" dirty="0">
                         <a:latin typeface="Calibri" charset="0"/>
@@ -23140,7 +23140,7 @@
                           <a:ea typeface="Calibri" pitchFamily="34" charset="-122"/>
                           <a:cs typeface="Calibri" pitchFamily="34" charset="-120"/>
                         </a:rPr>
-                        <a:t>0.01%</a:t>
+                        <a:t>0.90%</a:t>
                       </a:r>
                       <a:endParaRPr lang="en-US" sz="500" dirty="0">
                         <a:latin typeface="Calibri" charset="0"/>
@@ -23205,7 +23205,7 @@
                           <a:ea typeface="Calibri" pitchFamily="34" charset="-122"/>
                           <a:cs typeface="Calibri" pitchFamily="34" charset="-120"/>
                         </a:rPr>
-                        <a:t>0.01%</a:t>
+                        <a:t>0.96%</a:t>
                       </a:r>
                       <a:endParaRPr lang="en-US" sz="500" dirty="0">
                         <a:latin typeface="Calibri" charset="0"/>
@@ -23270,7 +23270,7 @@
                           <a:ea typeface="Calibri" pitchFamily="34" charset="-122"/>
                           <a:cs typeface="Calibri" pitchFamily="34" charset="-120"/>
                         </a:rPr>
-                        <a:t>0.08%</a:t>
+                        <a:t>8.10%</a:t>
                       </a:r>
                       <a:endParaRPr lang="en-US" sz="500" dirty="0">
                         <a:latin typeface="Calibri" charset="0"/>
@@ -24498,7 +24498,7 @@
                           <a:ea typeface="Calibri" pitchFamily="34" charset="-122"/>
                           <a:cs typeface="Calibri" pitchFamily="34" charset="-120"/>
                         </a:rPr>
-                        <a:t>0.01%</a:t>
+                        <a:t>0.79%</a:t>
                       </a:r>
                       <a:endParaRPr lang="en-US" sz="500" dirty="0">
                         <a:latin typeface="Calibri" charset="0"/>
@@ -24563,7 +24563,7 @@
                           <a:ea typeface="Calibri" pitchFamily="34" charset="-122"/>
                           <a:cs typeface="Calibri" pitchFamily="34" charset="-120"/>
                         </a:rPr>
-                        <a:t>0.01%</a:t>
+                        <a:t>0.79%</a:t>
                       </a:r>
                       <a:endParaRPr lang="en-US" sz="500" dirty="0">
                         <a:latin typeface="Calibri" charset="0"/>
@@ -24628,7 +24628,7 @@
                           <a:ea typeface="Calibri" pitchFamily="34" charset="-122"/>
                           <a:cs typeface="Calibri" pitchFamily="34" charset="-120"/>
                         </a:rPr>
-                        <a:t>0.01%</a:t>
+                        <a:t>0.80%</a:t>
                       </a:r>
                       <a:endParaRPr lang="en-US" sz="500" dirty="0">
                         <a:latin typeface="Calibri" charset="0"/>
@@ -24693,7 +24693,7 @@
                           <a:ea typeface="Calibri" pitchFamily="34" charset="-122"/>
                           <a:cs typeface="Calibri" pitchFamily="34" charset="-120"/>
                         </a:rPr>
-                        <a:t>0.01%</a:t>
+                        <a:t>0.80%</a:t>
                       </a:r>
                       <a:endParaRPr lang="en-US" sz="500" dirty="0">
                         <a:latin typeface="Calibri" charset="0"/>
@@ -24758,7 +24758,7 @@
                           <a:ea typeface="Calibri" pitchFamily="34" charset="-122"/>
                           <a:cs typeface="Calibri" pitchFamily="34" charset="-120"/>
                         </a:rPr>
-                        <a:t>0.01%</a:t>
+                        <a:t>0.80%</a:t>
                       </a:r>
                       <a:endParaRPr lang="en-US" sz="500" dirty="0">
                         <a:latin typeface="Calibri" charset="0"/>
@@ -24823,7 +24823,7 @@
                           <a:ea typeface="Calibri" pitchFamily="34" charset="-122"/>
                           <a:cs typeface="Calibri" pitchFamily="34" charset="-120"/>
                         </a:rPr>
-                        <a:t>0.01%</a:t>
+                        <a:t>0.79%</a:t>
                       </a:r>
                       <a:endParaRPr lang="en-US" sz="500" dirty="0">
                         <a:latin typeface="Calibri" charset="0"/>
@@ -24888,7 +24888,7 @@
                           <a:ea typeface="Calibri" pitchFamily="34" charset="-122"/>
                           <a:cs typeface="Calibri" pitchFamily="34" charset="-120"/>
                         </a:rPr>
-                        <a:t>0.01%</a:t>
+                        <a:t>0.74%</a:t>
                       </a:r>
                       <a:endParaRPr lang="en-US" sz="500" dirty="0">
                         <a:latin typeface="Calibri" charset="0"/>
@@ -24953,7 +24953,7 @@
                           <a:ea typeface="Calibri" pitchFamily="34" charset="-122"/>
                           <a:cs typeface="Calibri" pitchFamily="34" charset="-120"/>
                         </a:rPr>
-                        <a:t>0.01%</a:t>
+                        <a:t>0.68%</a:t>
                       </a:r>
                       <a:endParaRPr lang="en-US" sz="500" dirty="0">
                         <a:latin typeface="Calibri" charset="0"/>
@@ -25018,7 +25018,7 @@
                           <a:ea typeface="Calibri" pitchFamily="34" charset="-122"/>
                           <a:cs typeface="Calibri" pitchFamily="34" charset="-120"/>
                         </a:rPr>
-                        <a:t>0.01%</a:t>
+                        <a:t>0.65%</a:t>
                       </a:r>
                       <a:endParaRPr lang="en-US" sz="500" dirty="0">
                         <a:latin typeface="Calibri" charset="0"/>
@@ -25083,7 +25083,7 @@
                           <a:ea typeface="Calibri" pitchFamily="34" charset="-122"/>
                           <a:cs typeface="Calibri" pitchFamily="34" charset="-120"/>
                         </a:rPr>
-                        <a:t>0.01%</a:t>
+                        <a:t>0.62%</a:t>
                       </a:r>
                       <a:endParaRPr lang="en-US" sz="500" dirty="0">
                         <a:latin typeface="Calibri" charset="0"/>
@@ -25213,7 +25213,7 @@
                           <a:ea typeface="Calibri" pitchFamily="34" charset="-122"/>
                           <a:cs typeface="Calibri" pitchFamily="34" charset="-120"/>
                         </a:rPr>
-                        <a:t>7.57%</a:t>
+                        <a:t>15.78%</a:t>
                       </a:r>
                       <a:endParaRPr lang="en-US" sz="500" dirty="0">
                         <a:latin typeface="Calibri" charset="0"/>
@@ -25399,7 +25399,7 @@
                           <a:ea typeface="Calibri" pitchFamily="34" charset="-122"/>
                           <a:cs typeface="Calibri" pitchFamily="34" charset="-120"/>
                         </a:rPr>
-                        <a:t>0.01%</a:t>
+                        <a:t>1.07%</a:t>
                       </a:r>
                       <a:endParaRPr lang="en-US" sz="500" dirty="0">
                         <a:latin typeface="Calibri" charset="0"/>
@@ -25464,7 +25464,7 @@
                           <a:ea typeface="Calibri" pitchFamily="34" charset="-122"/>
                           <a:cs typeface="Calibri" pitchFamily="34" charset="-120"/>
                         </a:rPr>
-                        <a:t>0.01%</a:t>
+                        <a:t>0.93%</a:t>
                       </a:r>
                       <a:endParaRPr lang="en-US" sz="500" dirty="0">
                         <a:latin typeface="Calibri" charset="0"/>
@@ -25529,7 +25529,7 @@
                           <a:ea typeface="Calibri" pitchFamily="34" charset="-122"/>
                           <a:cs typeface="Calibri" pitchFamily="34" charset="-120"/>
                         </a:rPr>
-                        <a:t>0.01%</a:t>
+                        <a:t>0.94%</a:t>
                       </a:r>
                       <a:endParaRPr lang="en-US" sz="500" dirty="0">
                         <a:latin typeface="Calibri" charset="0"/>
@@ -25594,7 +25594,7 @@
                           <a:ea typeface="Calibri" pitchFamily="34" charset="-122"/>
                           <a:cs typeface="Calibri" pitchFamily="34" charset="-120"/>
                         </a:rPr>
-                        <a:t>0.01%</a:t>
+                        <a:t>0.95%</a:t>
                       </a:r>
                       <a:endParaRPr lang="en-US" sz="500" dirty="0">
                         <a:latin typeface="Calibri" charset="0"/>
@@ -25659,7 +25659,7 @@
                           <a:ea typeface="Calibri" pitchFamily="34" charset="-122"/>
                           <a:cs typeface="Calibri" pitchFamily="34" charset="-120"/>
                         </a:rPr>
-                        <a:t>0.01%</a:t>
+                        <a:t>0.94%</a:t>
                       </a:r>
                       <a:endParaRPr lang="en-US" sz="500" dirty="0">
                         <a:latin typeface="Calibri" charset="0"/>
@@ -25724,7 +25724,7 @@
                           <a:ea typeface="Calibri" pitchFamily="34" charset="-122"/>
                           <a:cs typeface="Calibri" pitchFamily="34" charset="-120"/>
                         </a:rPr>
-                        <a:t>0.01%</a:t>
+                        <a:t>0.95%</a:t>
                       </a:r>
                       <a:endParaRPr lang="en-US" sz="500" dirty="0">
                         <a:latin typeface="Calibri" charset="0"/>
@@ -25789,7 +25789,7 @@
                           <a:ea typeface="Calibri" pitchFamily="34" charset="-122"/>
                           <a:cs typeface="Calibri" pitchFamily="34" charset="-120"/>
                         </a:rPr>
-                        <a:t>0.01%</a:t>
+                        <a:t>0.96%</a:t>
                       </a:r>
                       <a:endParaRPr lang="en-US" sz="500" dirty="0">
                         <a:latin typeface="Calibri" charset="0"/>
@@ -25854,7 +25854,7 @@
                           <a:ea typeface="Calibri" pitchFamily="34" charset="-122"/>
                           <a:cs typeface="Calibri" pitchFamily="34" charset="-120"/>
                         </a:rPr>
-                        <a:t>0.01%</a:t>
+                        <a:t>0.87%</a:t>
                       </a:r>
                       <a:endParaRPr lang="en-US" sz="500" dirty="0">
                         <a:latin typeface="Calibri" charset="0"/>
@@ -25919,7 +25919,7 @@
                           <a:ea typeface="Calibri" pitchFamily="34" charset="-122"/>
                           <a:cs typeface="Calibri" pitchFamily="34" charset="-120"/>
                         </a:rPr>
-                        <a:t>0.01%</a:t>
+                        <a:t>0.87%</a:t>
                       </a:r>
                       <a:endParaRPr lang="en-US" sz="500" dirty="0">
                         <a:latin typeface="Calibri" charset="0"/>
@@ -25984,7 +25984,7 @@
                           <a:ea typeface="Calibri" pitchFamily="34" charset="-122"/>
                           <a:cs typeface="Calibri" pitchFamily="34" charset="-120"/>
                         </a:rPr>
-                        <a:t>0.01%</a:t>
+                        <a:t>0.80%</a:t>
                       </a:r>
                       <a:endParaRPr lang="en-US" sz="500" dirty="0">
                         <a:latin typeface="Calibri" charset="0"/>
@@ -26049,7 +26049,7 @@
                           <a:ea typeface="Calibri" pitchFamily="34" charset="-122"/>
                           <a:cs typeface="Calibri" pitchFamily="34" charset="-120"/>
                         </a:rPr>
-                        <a:t>0.01%</a:t>
+                        <a:t>0.75%</a:t>
                       </a:r>
                       <a:endParaRPr lang="en-US" sz="500" dirty="0">
                         <a:latin typeface="Calibri" charset="0"/>
@@ -26114,7 +26114,7 @@
                           <a:ea typeface="Calibri" pitchFamily="34" charset="-122"/>
                           <a:cs typeface="Calibri" pitchFamily="34" charset="-120"/>
                         </a:rPr>
-                        <a:t>0.01%</a:t>
+                        <a:t>0.84%</a:t>
                       </a:r>
                       <a:endParaRPr lang="en-US" sz="500" dirty="0">
                         <a:latin typeface="Calibri" charset="0"/>
@@ -26179,7 +26179,7 @@
                           <a:ea typeface="Calibri" pitchFamily="34" charset="-122"/>
                           <a:cs typeface="Calibri" pitchFamily="34" charset="-120"/>
                         </a:rPr>
-                        <a:t>0.11%</a:t>
+                        <a:t>11.43%</a:t>
                       </a:r>
                       <a:endParaRPr lang="en-US" sz="500" dirty="0">
                         <a:latin typeface="Calibri" charset="0"/>
@@ -27407,7 +27407,7 @@
                           <a:ea typeface="Calibri" pitchFamily="34" charset="-122"/>
                           <a:cs typeface="Calibri" pitchFamily="34" charset="-120"/>
                         </a:rPr>
-                        <a:t>0.01%</a:t>
+                        <a:t>0.53%</a:t>
                       </a:r>
                       <a:endParaRPr lang="en-US" sz="500" dirty="0">
                         <a:latin typeface="Calibri" charset="0"/>
@@ -27472,7 +27472,7 @@
                           <a:ea typeface="Calibri" pitchFamily="34" charset="-122"/>
                           <a:cs typeface="Calibri" pitchFamily="34" charset="-120"/>
                         </a:rPr>
-                        <a:t>0.00%</a:t>
+                        <a:t>0.48%</a:t>
                       </a:r>
                       <a:endParaRPr lang="en-US" sz="500" dirty="0">
                         <a:latin typeface="Calibri" charset="0"/>
@@ -27537,7 +27537,7 @@
                           <a:ea typeface="Calibri" pitchFamily="34" charset="-122"/>
                           <a:cs typeface="Calibri" pitchFamily="34" charset="-120"/>
                         </a:rPr>
-                        <a:t>0.00%</a:t>
+                        <a:t>0.43%</a:t>
                       </a:r>
                       <a:endParaRPr lang="en-US" sz="500" dirty="0">
                         <a:latin typeface="Calibri" charset="0"/>
@@ -27602,7 +27602,7 @@
                           <a:ea typeface="Calibri" pitchFamily="34" charset="-122"/>
                           <a:cs typeface="Calibri" pitchFamily="34" charset="-120"/>
                         </a:rPr>
-                        <a:t>0.00%</a:t>
+                        <a:t>0.40%</a:t>
                       </a:r>
                       <a:endParaRPr lang="en-US" sz="500" dirty="0">
                         <a:latin typeface="Calibri" charset="0"/>
@@ -27667,7 +27667,7 @@
                           <a:ea typeface="Calibri" pitchFamily="34" charset="-122"/>
                           <a:cs typeface="Calibri" pitchFamily="34" charset="-120"/>
                         </a:rPr>
-                        <a:t>0.00%</a:t>
+                        <a:t>0.37%</a:t>
                       </a:r>
                       <a:endParaRPr lang="en-US" sz="500" dirty="0">
                         <a:latin typeface="Calibri" charset="0"/>
@@ -27732,7 +27732,7 @@
                           <a:ea typeface="Calibri" pitchFamily="34" charset="-122"/>
                           <a:cs typeface="Calibri" pitchFamily="34" charset="-120"/>
                         </a:rPr>
-                        <a:t>0.00%</a:t>
+                        <a:t>0.35%</a:t>
                       </a:r>
                       <a:endParaRPr lang="en-US" sz="500" dirty="0">
                         <a:latin typeface="Calibri" charset="0"/>
@@ -27797,7 +27797,7 @@
                           <a:ea typeface="Calibri" pitchFamily="34" charset="-122"/>
                           <a:cs typeface="Calibri" pitchFamily="34" charset="-120"/>
                         </a:rPr>
-                        <a:t>0.00%</a:t>
+                        <a:t>0.35%</a:t>
                       </a:r>
                       <a:endParaRPr lang="en-US" sz="500" dirty="0">
                         <a:latin typeface="Calibri" charset="0"/>
@@ -27862,7 +27862,7 @@
                           <a:ea typeface="Calibri" pitchFamily="34" charset="-122"/>
                           <a:cs typeface="Calibri" pitchFamily="34" charset="-120"/>
                         </a:rPr>
-                        <a:t>0.00%</a:t>
+                        <a:t>0.34%</a:t>
                       </a:r>
                       <a:endParaRPr lang="en-US" sz="500" dirty="0">
                         <a:latin typeface="Calibri" charset="0"/>
@@ -27927,7 +27927,7 @@
                           <a:ea typeface="Calibri" pitchFamily="34" charset="-122"/>
                           <a:cs typeface="Calibri" pitchFamily="34" charset="-120"/>
                         </a:rPr>
-                        <a:t>0.00%</a:t>
+                        <a:t>0.33%</a:t>
                       </a:r>
                       <a:endParaRPr lang="en-US" sz="500" dirty="0">
                         <a:latin typeface="Calibri" charset="0"/>
@@ -27992,7 +27992,7 @@
                           <a:ea typeface="Calibri" pitchFamily="34" charset="-122"/>
                           <a:cs typeface="Calibri" pitchFamily="34" charset="-120"/>
                         </a:rPr>
-                        <a:t>0.00%</a:t>
+                        <a:t>0.32%</a:t>
                       </a:r>
                       <a:endParaRPr lang="en-US" sz="500" dirty="0">
                         <a:latin typeface="Calibri" charset="0"/>
@@ -28122,7 +28122,7 @@
                           <a:ea typeface="Calibri" pitchFamily="34" charset="-122"/>
                           <a:cs typeface="Calibri" pitchFamily="34" charset="-120"/>
                         </a:rPr>
-                        <a:t>-2.95%</a:t>
+                        <a:t>0.86%</a:t>
                       </a:r>
                       <a:endParaRPr lang="en-US" sz="500" dirty="0">
                         <a:latin typeface="Calibri" charset="0"/>
@@ -28308,7 +28308,7 @@
                           <a:ea typeface="Calibri" pitchFamily="34" charset="-122"/>
                           <a:cs typeface="Calibri" pitchFamily="34" charset="-120"/>
                         </a:rPr>
-                        <a:t>0.01%</a:t>
+                        <a:t>0.76%</a:t>
                       </a:r>
                       <a:endParaRPr lang="en-US" sz="500" dirty="0">
                         <a:latin typeface="Calibri" charset="0"/>
@@ -28373,7 +28373,7 @@
                           <a:ea typeface="Calibri" pitchFamily="34" charset="-122"/>
                           <a:cs typeface="Calibri" pitchFamily="34" charset="-120"/>
                         </a:rPr>
-                        <a:t>0.01%</a:t>
+                        <a:t>0.61%</a:t>
                       </a:r>
                       <a:endParaRPr lang="en-US" sz="500" dirty="0">
                         <a:latin typeface="Calibri" charset="0"/>
@@ -28438,7 +28438,7 @@
                           <a:ea typeface="Calibri" pitchFamily="34" charset="-122"/>
                           <a:cs typeface="Calibri" pitchFamily="34" charset="-120"/>
                         </a:rPr>
-                        <a:t>0.01%</a:t>
+                        <a:t>0.65%</a:t>
                       </a:r>
                       <a:endParaRPr lang="en-US" sz="500" dirty="0">
                         <a:latin typeface="Calibri" charset="0"/>
@@ -28503,7 +28503,7 @@
                           <a:ea typeface="Calibri" pitchFamily="34" charset="-122"/>
                           <a:cs typeface="Calibri" pitchFamily="34" charset="-120"/>
                         </a:rPr>
-                        <a:t>0.01%</a:t>
+                        <a:t>0.54%</a:t>
                       </a:r>
                       <a:endParaRPr lang="en-US" sz="500" dirty="0">
                         <a:latin typeface="Calibri" charset="0"/>
@@ -28568,7 +28568,7 @@
                           <a:ea typeface="Calibri" pitchFamily="34" charset="-122"/>
                           <a:cs typeface="Calibri" pitchFamily="34" charset="-120"/>
                         </a:rPr>
-                        <a:t>0.01%</a:t>
+                        <a:t>0.58%</a:t>
                       </a:r>
                       <a:endParaRPr lang="en-US" sz="500" dirty="0">
                         <a:latin typeface="Calibri" charset="0"/>
@@ -28633,7 +28633,7 @@
                           <a:ea typeface="Calibri" pitchFamily="34" charset="-122"/>
                           <a:cs typeface="Calibri" pitchFamily="34" charset="-120"/>
                         </a:rPr>
-                        <a:t>0.01%</a:t>
+                        <a:t>0.53%</a:t>
                       </a:r>
                       <a:endParaRPr lang="en-US" sz="500" dirty="0">
                         <a:latin typeface="Calibri" charset="0"/>
@@ -28698,7 +28698,7 @@
                           <a:ea typeface="Calibri" pitchFamily="34" charset="-122"/>
                           <a:cs typeface="Calibri" pitchFamily="34" charset="-120"/>
                         </a:rPr>
-                        <a:t>0.00%</a:t>
+                        <a:t>0.44%</a:t>
                       </a:r>
                       <a:endParaRPr lang="en-US" sz="500" dirty="0">
                         <a:latin typeface="Calibri" charset="0"/>
@@ -28763,7 +28763,7 @@
                           <a:ea typeface="Calibri" pitchFamily="34" charset="-122"/>
                           <a:cs typeface="Calibri" pitchFamily="34" charset="-120"/>
                         </a:rPr>
-                        <a:t>0.00%</a:t>
+                        <a:t>0.41%</a:t>
                       </a:r>
                       <a:endParaRPr lang="en-US" sz="500" dirty="0">
                         <a:latin typeface="Calibri" charset="0"/>
@@ -28828,7 +28828,7 @@
                           <a:ea typeface="Calibri" pitchFamily="34" charset="-122"/>
                           <a:cs typeface="Calibri" pitchFamily="34" charset="-120"/>
                         </a:rPr>
-                        <a:t>0.00%</a:t>
+                        <a:t>0.43%</a:t>
                       </a:r>
                       <a:endParaRPr lang="en-US" sz="500" dirty="0">
                         <a:latin typeface="Calibri" charset="0"/>
@@ -28893,7 +28893,7 @@
                           <a:ea typeface="Calibri" pitchFamily="34" charset="-122"/>
                           <a:cs typeface="Calibri" pitchFamily="34" charset="-120"/>
                         </a:rPr>
-                        <a:t>0.00%</a:t>
+                        <a:t>0.36%</a:t>
                       </a:r>
                       <a:endParaRPr lang="en-US" sz="500" dirty="0">
                         <a:latin typeface="Calibri" charset="0"/>
@@ -28958,7 +28958,7 @@
                           <a:ea typeface="Calibri" pitchFamily="34" charset="-122"/>
                           <a:cs typeface="Calibri" pitchFamily="34" charset="-120"/>
                         </a:rPr>
-                        <a:t>0.00%</a:t>
+                        <a:t>0.39%</a:t>
                       </a:r>
                       <a:endParaRPr lang="en-US" sz="500" dirty="0">
                         <a:latin typeface="Calibri" charset="0"/>
@@ -29023,7 +29023,7 @@
                           <a:ea typeface="Calibri" pitchFamily="34" charset="-122"/>
                           <a:cs typeface="Calibri" pitchFamily="34" charset="-120"/>
                         </a:rPr>
-                        <a:t>0.00%</a:t>
+                        <a:t>0.35%</a:t>
                       </a:r>
                       <a:endParaRPr lang="en-US" sz="500" dirty="0">
                         <a:latin typeface="Calibri" charset="0"/>
@@ -29088,7 +29088,7 @@
                           <a:ea typeface="Calibri" pitchFamily="34" charset="-122"/>
                           <a:cs typeface="Calibri" pitchFamily="34" charset="-120"/>
                         </a:rPr>
-                        <a:t>0.06%</a:t>
+                        <a:t>6.21%</a:t>
                       </a:r>
                       <a:endParaRPr lang="en-US" sz="500" dirty="0">
                         <a:latin typeface="Calibri" charset="0"/>
@@ -31217,7 +31217,7 @@
                           <a:ea typeface="Calibri" pitchFamily="34" charset="-122"/>
                           <a:cs typeface="Calibri" pitchFamily="34" charset="-120"/>
                         </a:rPr>
-                        <a:t>0.00%</a:t>
+                        <a:t>0.28%</a:t>
                       </a:r>
                       <a:endParaRPr lang="en-US" sz="500" dirty="0">
                         <a:latin typeface="Calibri" charset="0"/>
@@ -31876,7 +31876,7 @@
                           <a:ea typeface="Calibri" pitchFamily="34" charset="-122"/>
                           <a:cs typeface="Calibri" pitchFamily="34" charset="-120"/>
                         </a:rPr>
-                        <a:t>0.00%</a:t>
+                        <a:t>0.28%</a:t>
                       </a:r>
                       <a:endParaRPr lang="en-US" sz="500" dirty="0">
                         <a:latin typeface="Calibri" charset="0"/>

--- a/folletos/2026-04/pptx/FIP_VANTRUST_LIQUIDEZ_RECURRENTE.pptx
+++ b/folletos/2026-04/pptx/FIP_VANTRUST_LIQUIDEZ_RECURRENTE.pptx
@@ -2969,7 +2969,7 @@
                 <a:ea typeface="Calibri" pitchFamily="34" charset="-122"/>
                 <a:cs typeface="Calibri" pitchFamily="34" charset="-120"/>
               </a:rPr>
-              <a:t>prueba CLP</a:t>
+              <a:t>prueba 13 CLP</a:t>
             </a:r>
             <a:endParaRPr lang="en-US" sz="800" dirty="0"/>
           </a:p>

--- a/folletos/2026-04/pptx/FIP_VANTRUST_LIQUIDEZ_RECURRENTE.pptx
+++ b/folletos/2026-04/pptx/FIP_VANTRUST_LIQUIDEZ_RECURRENTE.pptx
@@ -4823,7 +4823,7 @@
                 <a:ea typeface="Calibri" pitchFamily="34" charset="-122"/>
                 <a:cs typeface="Calibri" pitchFamily="34" charset="-120"/>
               </a:rPr>
-              <a:t>prueba CLP</a:t>
+              <a:t>prueba 13 CLP</a:t>
             </a:r>
             <a:endParaRPr lang="en-US" sz="800" dirty="0"/>
           </a:p>

--- a/folletos/2026-04/pptx/FIP_VANTRUST_LIQUIDEZ_RECURRENTE.pptx
+++ b/folletos/2026-04/pptx/FIP_VANTRUST_LIQUIDEZ_RECURRENTE.pptx
@@ -4841,7 +4841,7 @@
                 <a:ea typeface="Calibri" pitchFamily="34" charset="-122"/>
                 <a:cs typeface="Calibri" pitchFamily="34" charset="-120"/>
               </a:rPr>
-              <a:t>prueba CLP</a:t>
+              <a:t>prueba 14 CLP</a:t>
             </a:r>
             <a:endParaRPr lang="en-US" sz="800" dirty="0"/>
           </a:p>
